--- a/Huh_PitchDeck.pptx
+++ b/Huh_PitchDeck.pptx
@@ -14370,7 +14370,7 @@
         <p:spPr>
           <a:xfrm>
             <a:off x="3474720" y="685800"/>
-            <a:ext cx="5212080" cy="5486400"/>
+            <a:ext cx="5212080" cy="1783080"/>
           </a:xfrm>
           <a:prstGeom prst="rect">
             <a:avLst/>
@@ -14389,7 +14389,7 @@
               </a:spcAft>
             </a:pPr>
             <a:r>
-              <a:rPr sz="1500" b="1" i="0">
+              <a:rPr sz="1700" b="1" i="0">
                 <a:solidFill>
                   <a:srgbClr val="262626"/>
                 </a:solidFill>
@@ -14401,13 +14401,16 @@
           <a:p>
             <a:pPr marL="164592" indent="-164592">
               <a:spcAft>
-                <a:spcPts val="400"/>
+                <a:spcPts val="500"/>
               </a:spcAft>
+              <a:buClr>
+                <a:srgbClr val="C0392B"/>
+              </a:buClr>
               <a:buFont typeface="Arial"/>
               <a:buChar char="•"/>
             </a:pPr>
             <a:r>
-              <a:rPr sz="1400" b="0" i="0">
+              <a:rPr sz="1500" b="0" i="0">
                 <a:solidFill>
                   <a:srgbClr val="262626"/>
                 </a:solidFill>
@@ -14419,13 +14422,16 @@
           <a:p>
             <a:pPr marL="164592" indent="-164592">
               <a:spcAft>
-                <a:spcPts val="400"/>
+                <a:spcPts val="500"/>
               </a:spcAft>
+              <a:buClr>
+                <a:srgbClr val="C0392B"/>
+              </a:buClr>
               <a:buFont typeface="Arial"/>
               <a:buChar char="•"/>
             </a:pPr>
             <a:r>
-              <a:rPr sz="1400" b="0" i="0">
+              <a:rPr sz="1500" b="0" i="0">
                 <a:solidFill>
                   <a:srgbClr val="262626"/>
                 </a:solidFill>
@@ -14437,19 +14443,358 @@
           <a:p>
             <a:pPr marL="164592" indent="-164592">
               <a:spcAft>
-                <a:spcPts val="1000"/>
+                <a:spcPts val="0"/>
               </a:spcAft>
+              <a:buClr>
+                <a:srgbClr val="C0392B"/>
+              </a:buClr>
               <a:buFont typeface="Arial"/>
               <a:buChar char="•"/>
             </a:pPr>
             <a:r>
-              <a:rPr sz="1400" b="0" i="1">
+              <a:rPr sz="1500" b="1" i="1">
+                <a:solidFill>
+                  <a:srgbClr val="C0392B"/>
+                </a:solidFill>
+                <a:latin typeface="Calibri"/>
+              </a:rPr>
+              <a:t>It happened to me: </a:t>
+            </a:r>
+            <a:r>
+              <a:rPr sz="1500" b="0" i="1">
                 <a:solidFill>
                   <a:srgbClr val="262626"/>
                 </a:solidFill>
                 <a:latin typeface="Calibri"/>
               </a:rPr>
-              <a:t>It happened to me: I was catfished by a fake profile.</a:t>
+              <a:t>I was catfished by a fake profile.</a:t>
+            </a:r>
+          </a:p>
+        </p:txBody>
+      </p:sp>
+      <p:sp>
+        <p:nvSpPr>
+          <p:cNvPr id="47" name="TextBox 46"/>
+          <p:cNvSpPr txBox="1"/>
+          <p:nvPr/>
+        </p:nvSpPr>
+        <p:spPr>
+          <a:xfrm>
+            <a:off x="3474720" y="2606040"/>
+            <a:ext cx="5212080" cy="320040"/>
+          </a:xfrm>
+          <a:prstGeom prst="rect">
+            <a:avLst/>
+          </a:prstGeom>
+          <a:noFill/>
+        </p:spPr>
+        <p:txBody>
+          <a:bodyPr wrap="square">
+            <a:spAutoFit/>
+          </a:bodyPr>
+          <a:lstStyle/>
+          <a:p>
+            <a:pPr>
+              <a:spcAft>
+                <a:spcPts val="500"/>
+              </a:spcAft>
+            </a:pPr>
+            <a:r>
+              <a:rPr sz="1350" b="1" i="0">
+                <a:solidFill>
+                  <a:srgbClr val="C0392B"/>
+                </a:solidFill>
+                <a:latin typeface="Calibri"/>
+              </a:rPr>
+              <a:t>Validation — McAfee 2026 survey (Indian adults; not students)</a:t>
+            </a:r>
+          </a:p>
+        </p:txBody>
+      </p:sp>
+      <p:sp>
+        <p:nvSpPr>
+          <p:cNvPr id="48" name="Rounded Rectangle 47"/>
+          <p:cNvSpPr/>
+          <p:nvPr/>
+        </p:nvSpPr>
+        <p:spPr>
+          <a:xfrm>
+            <a:off x="3474720" y="3017520"/>
+            <a:ext cx="1664208" cy="1005840"/>
+          </a:xfrm>
+          <a:prstGeom prst="roundRect">
+            <a:avLst>
+              <a:gd name="adj" fmla="val 10000"/>
+            </a:avLst>
+          </a:prstGeom>
+          <a:solidFill>
+            <a:srgbClr val="FAEEEC"/>
+          </a:solidFill>
+          <a:ln w="12700">
+            <a:solidFill>
+              <a:srgbClr val="FAEEEC"/>
+            </a:solidFill>
+          </a:ln>
+        </p:spPr>
+        <p:style>
+          <a:lnRef idx="1">
+            <a:schemeClr val="accent1"/>
+          </a:lnRef>
+          <a:fillRef idx="3">
+            <a:schemeClr val="accent1"/>
+          </a:fillRef>
+          <a:effectRef idx="2">
+            <a:schemeClr val="accent1"/>
+          </a:effectRef>
+          <a:fontRef idx="minor">
+            <a:schemeClr val="lt1"/>
+          </a:fontRef>
+        </p:style>
+        <p:txBody>
+          <a:bodyPr rtlCol="0" anchor="ctr" wrap="square" lIns="109728" rIns="109728" tIns="73152" bIns="73152"/>
+          <a:lstStyle/>
+          <a:p>
+            <a:pPr algn="ctr">
+              <a:spcAft>
+                <a:spcPts val="100"/>
+              </a:spcAft>
+            </a:pPr>
+            <a:r>
+              <a:rPr sz="2000" b="1" i="0">
+                <a:solidFill>
+                  <a:srgbClr val="C0392B"/>
+                </a:solidFill>
+                <a:latin typeface="Calibri"/>
+              </a:rPr>
+              <a:t>75%</a:t>
+            </a:r>
+          </a:p>
+          <a:p>
+            <a:pPr>
+              <a:spcAft>
+                <a:spcPts val="0"/>
+              </a:spcAft>
+            </a:pPr>
+            <a:r>
+              <a:rPr sz="1200" b="0" i="0">
+                <a:solidFill>
+                  <a:srgbClr val="595959"/>
+                </a:solidFill>
+                <a:latin typeface="Calibri"/>
+              </a:rPr>
+              <a:t>saw fake or AI profiles</a:t>
+            </a:r>
+          </a:p>
+        </p:txBody>
+      </p:sp>
+      <p:sp>
+        <p:nvSpPr>
+          <p:cNvPr id="49" name="Rounded Rectangle 48"/>
+          <p:cNvSpPr/>
+          <p:nvPr/>
+        </p:nvSpPr>
+        <p:spPr>
+          <a:xfrm>
+            <a:off x="5248656" y="3017520"/>
+            <a:ext cx="1664208" cy="1005840"/>
+          </a:xfrm>
+          <a:prstGeom prst="roundRect">
+            <a:avLst>
+              <a:gd name="adj" fmla="val 10000"/>
+            </a:avLst>
+          </a:prstGeom>
+          <a:solidFill>
+            <a:srgbClr val="FAEEEC"/>
+          </a:solidFill>
+          <a:ln w="12700">
+            <a:solidFill>
+              <a:srgbClr val="FAEEEC"/>
+            </a:solidFill>
+          </a:ln>
+        </p:spPr>
+        <p:style>
+          <a:lnRef idx="1">
+            <a:schemeClr val="accent1"/>
+          </a:lnRef>
+          <a:fillRef idx="3">
+            <a:schemeClr val="accent1"/>
+          </a:fillRef>
+          <a:effectRef idx="2">
+            <a:schemeClr val="accent1"/>
+          </a:effectRef>
+          <a:fontRef idx="minor">
+            <a:schemeClr val="lt1"/>
+          </a:fontRef>
+        </p:style>
+        <p:txBody>
+          <a:bodyPr rtlCol="0" anchor="ctr" wrap="square" lIns="109728" rIns="109728" tIns="73152" bIns="73152"/>
+          <a:lstStyle/>
+          <a:p>
+            <a:pPr algn="ctr">
+              <a:spcAft>
+                <a:spcPts val="100"/>
+              </a:spcAft>
+            </a:pPr>
+            <a:r>
+              <a:rPr sz="2000" b="1" i="0">
+                <a:solidFill>
+                  <a:srgbClr val="C0392B"/>
+                </a:solidFill>
+                <a:latin typeface="Calibri"/>
+              </a:rPr>
+              <a:t>33%</a:t>
+            </a:r>
+          </a:p>
+          <a:p>
+            <a:pPr>
+              <a:spcAft>
+                <a:spcPts val="0"/>
+              </a:spcAft>
+            </a:pPr>
+            <a:r>
+              <a:rPr sz="1200" b="0" i="0">
+                <a:solidFill>
+                  <a:srgbClr val="595959"/>
+                </a:solidFill>
+                <a:latin typeface="Calibri"/>
+              </a:rPr>
+              <a:t>reported being catfished</a:t>
+            </a:r>
+          </a:p>
+        </p:txBody>
+      </p:sp>
+      <p:sp>
+        <p:nvSpPr>
+          <p:cNvPr id="50" name="Rounded Rectangle 49"/>
+          <p:cNvSpPr/>
+          <p:nvPr/>
+        </p:nvSpPr>
+        <p:spPr>
+          <a:xfrm>
+            <a:off x="7022592" y="3017520"/>
+            <a:ext cx="1664208" cy="1005840"/>
+          </a:xfrm>
+          <a:prstGeom prst="roundRect">
+            <a:avLst>
+              <a:gd name="adj" fmla="val 10000"/>
+            </a:avLst>
+          </a:prstGeom>
+          <a:solidFill>
+            <a:srgbClr val="FAEEEC"/>
+          </a:solidFill>
+          <a:ln w="12700">
+            <a:solidFill>
+              <a:srgbClr val="FAEEEC"/>
+            </a:solidFill>
+          </a:ln>
+        </p:spPr>
+        <p:style>
+          <a:lnRef idx="1">
+            <a:schemeClr val="accent1"/>
+          </a:lnRef>
+          <a:fillRef idx="3">
+            <a:schemeClr val="accent1"/>
+          </a:fillRef>
+          <a:effectRef idx="2">
+            <a:schemeClr val="accent1"/>
+          </a:effectRef>
+          <a:fontRef idx="minor">
+            <a:schemeClr val="lt1"/>
+          </a:fontRef>
+        </p:style>
+        <p:txBody>
+          <a:bodyPr rtlCol="0" anchor="ctr" wrap="square" lIns="109728" rIns="109728" tIns="73152" bIns="73152"/>
+          <a:lstStyle/>
+          <a:p>
+            <a:pPr algn="ctr">
+              <a:spcAft>
+                <a:spcPts val="100"/>
+              </a:spcAft>
+            </a:pPr>
+            <a:r>
+              <a:rPr sz="2000" b="1" i="0">
+                <a:solidFill>
+                  <a:srgbClr val="C0392B"/>
+                </a:solidFill>
+                <a:latin typeface="Calibri"/>
+              </a:rPr>
+              <a:t>1 in 7</a:t>
+            </a:r>
+          </a:p>
+          <a:p>
+            <a:pPr>
+              <a:spcAft>
+                <a:spcPts val="0"/>
+              </a:spcAft>
+            </a:pPr>
+            <a:r>
+              <a:rPr sz="1200" b="0" i="0">
+                <a:solidFill>
+                  <a:srgbClr val="595959"/>
+                </a:solidFill>
+                <a:latin typeface="Calibri"/>
+              </a:rPr>
+              <a:t>lost money — avg Rs 2,80,650</a:t>
+            </a:r>
+          </a:p>
+        </p:txBody>
+      </p:sp>
+      <p:sp>
+        <p:nvSpPr>
+          <p:cNvPr id="51" name="Rounded Rectangle 50"/>
+          <p:cNvSpPr/>
+          <p:nvPr/>
+        </p:nvSpPr>
+        <p:spPr>
+          <a:xfrm>
+            <a:off x="3474720" y="4343400"/>
+            <a:ext cx="5212080" cy="1417320"/>
+          </a:xfrm>
+          <a:prstGeom prst="roundRect">
+            <a:avLst>
+              <a:gd name="adj" fmla="val 10000"/>
+            </a:avLst>
+          </a:prstGeom>
+          <a:solidFill>
+            <a:srgbClr val="FAEEEC"/>
+          </a:solidFill>
+          <a:ln w="12700">
+            <a:solidFill>
+              <a:srgbClr val="FAEEEC"/>
+            </a:solidFill>
+          </a:ln>
+        </p:spPr>
+        <p:style>
+          <a:lnRef idx="1">
+            <a:schemeClr val="accent1"/>
+          </a:lnRef>
+          <a:fillRef idx="3">
+            <a:schemeClr val="accent1"/>
+          </a:fillRef>
+          <a:effectRef idx="2">
+            <a:schemeClr val="accent1"/>
+          </a:effectRef>
+          <a:fontRef idx="minor">
+            <a:schemeClr val="lt1"/>
+          </a:fontRef>
+        </p:style>
+        <p:txBody>
+          <a:bodyPr rtlCol="0" anchor="ctr" wrap="square" lIns="109728" rIns="109728" tIns="73152" bIns="73152"/>
+          <a:lstStyle/>
+          <a:p>
+            <a:pPr algn="ctr">
+              <a:spcAft>
+                <a:spcPts val="300"/>
+              </a:spcAft>
+            </a:pPr>
+            <a:r>
+              <a:rPr sz="1300" b="1" i="0">
+                <a:solidFill>
+                  <a:srgbClr val="C0392B"/>
+                </a:solidFill>
+                <a:latin typeface="Calibri"/>
+              </a:rPr>
+              <a:t>Demand for meeting people on live video</a:t>
             </a:r>
           </a:p>
           <a:p>
@@ -14459,23 +14804,23 @@
               </a:spcAft>
             </a:pPr>
             <a:r>
-              <a:rPr sz="1350" b="1" i="0">
+              <a:rPr sz="1400" b="0" i="0">
                 <a:solidFill>
                   <a:srgbClr val="262626"/>
                 </a:solidFill>
                 <a:latin typeface="Calibri"/>
               </a:rPr>
-              <a:t>Validation — McAfee 2026 survey (Indian adults; not students)</a:t>
+              <a:t>Omegle drew </a:t>
             </a:r>
-          </a:p>
-          <a:p>
-            <a:pPr marL="164592" indent="-164592">
-              <a:spcAft>
-                <a:spcPts val="400"/>
-              </a:spcAft>
-              <a:buFont typeface="Arial"/>
-              <a:buChar char="•"/>
-            </a:pPr>
+            <a:r>
+              <a:rPr sz="1400" b="1" i="0">
+                <a:solidFill>
+                  <a:srgbClr val="C0392B"/>
+                </a:solidFill>
+                <a:latin typeface="Calibri"/>
+              </a:rPr>
+              <a:t>~50M visitors </a:t>
+            </a:r>
             <a:r>
               <a:rPr sz="1400" b="0" i="0">
                 <a:solidFill>
@@ -14483,77 +14828,7 @@
                 </a:solidFill>
                 <a:latin typeface="Calibri"/>
               </a:rPr>
-              <a:t>75% have encountered fake or AI-generated profiles</a:t>
-            </a:r>
-          </a:p>
-          <a:p>
-            <a:pPr marL="164592" indent="-164592">
-              <a:spcAft>
-                <a:spcPts val="400"/>
-              </a:spcAft>
-              <a:buFont typeface="Arial"/>
-              <a:buChar char="•"/>
-            </a:pPr>
-            <a:r>
-              <a:rPr sz="1400" b="0" i="0">
-                <a:solidFill>
-                  <a:srgbClr val="262626"/>
-                </a:solidFill>
-                <a:latin typeface="Calibri"/>
-              </a:rPr>
-              <a:t>33% report being catfished</a:t>
-            </a:r>
-          </a:p>
-          <a:p>
-            <a:pPr marL="164592" indent="-164592">
-              <a:spcAft>
-                <a:spcPts val="1000"/>
-              </a:spcAft>
-              <a:buFont typeface="Arial"/>
-              <a:buChar char="•"/>
-            </a:pPr>
-            <a:r>
-              <a:rPr sz="1400" b="0" i="0">
-                <a:solidFill>
-                  <a:srgbClr val="262626"/>
-                </a:solidFill>
-                <a:latin typeface="Calibri"/>
-              </a:rPr>
-              <a:t>1 in 7 lost money to romance scams — averaging Rs 2,80,650</a:t>
-            </a:r>
-          </a:p>
-          <a:p>
-            <a:pPr>
-              <a:spcAft>
-                <a:spcPts val="400"/>
-              </a:spcAft>
-            </a:pPr>
-            <a:r>
-              <a:rPr sz="1350" b="1" i="0">
-                <a:solidFill>
-                  <a:srgbClr val="262626"/>
-                </a:solidFill>
-                <a:latin typeface="Calibri"/>
-              </a:rPr>
-              <a:t>Demand for meeting people on live video</a:t>
-            </a:r>
-          </a:p>
-          <a:p>
-            <a:pPr marL="164592" indent="-164592">
-              <a:spcAft>
-                <a:spcPts val="800"/>
-              </a:spcAft>
-              <a:buFont typeface="Arial"/>
-              <a:buChar char="•"/>
-            </a:pPr>
-            <a:r>
-              <a:rPr sz="1400" b="0" i="0">
-                <a:solidFill>
-                  <a:srgbClr val="262626"/>
-                </a:solidFill>
-                <a:latin typeface="Calibri"/>
-              </a:rPr>
-              <a:t>Omegle drew ~50M visitors in its final month (Oct 2023) before shutting down</a:t>
+              <a:t>in its final month (Oct 2023) — then shut down. The appetite for spontaneous video meeting is proven.</a:t>
             </a:r>
           </a:p>
           <a:p>
@@ -15245,11 +15520,11 @@
           <a:p>
             <a:pPr>
               <a:spcAft>
-                <a:spcPts val="800"/>
+                <a:spcPts val="1000"/>
               </a:spcAft>
             </a:pPr>
             <a:r>
-              <a:rPr sz="1500" b="1" i="0">
+              <a:rPr sz="1700" b="1" i="0">
                 <a:solidFill>
                   <a:srgbClr val="262626"/>
                 </a:solidFill>
@@ -15261,11 +15536,19 @@
           <a:p>
             <a:pPr marL="164592" indent="-164592">
               <a:spcAft>
-                <a:spcPts val="400"/>
+                <a:spcPts val="700"/>
               </a:spcAft>
-              <a:buFont typeface="Arial"/>
-              <a:buChar char="•"/>
+              <a:buNone/>
             </a:pPr>
+            <a:r>
+              <a:rPr sz="1400" b="1" i="0">
+                <a:solidFill>
+                  <a:srgbClr val="C0392B"/>
+                </a:solidFill>
+                <a:latin typeface="Calibri"/>
+              </a:rPr>
+              <a:t>Verified sign-up: </a:t>
+            </a:r>
             <a:r>
               <a:rPr sz="1400" b="0" i="0">
                 <a:solidFill>
@@ -15273,17 +15556,25 @@
                 </a:solidFill>
                 <a:latin typeface="Calibri"/>
               </a:rPr>
-              <a:t>Sign up with your college email or student ID — every profile verified</a:t>
+              <a:t>college email or student ID — every profile checked</a:t>
             </a:r>
           </a:p>
           <a:p>
             <a:pPr marL="164592" indent="-164592">
               <a:spcAft>
-                <a:spcPts val="400"/>
+                <a:spcPts val="700"/>
               </a:spcAft>
-              <a:buFont typeface="Arial"/>
-              <a:buChar char="•"/>
+              <a:buNone/>
             </a:pPr>
+            <a:r>
+              <a:rPr sz="1400" b="1" i="0">
+                <a:solidFill>
+                  <a:srgbClr val="C0392B"/>
+                </a:solidFill>
+                <a:latin typeface="Calibri"/>
+              </a:rPr>
+              <a:t>Intent-based feed: </a:t>
+            </a:r>
             <a:r>
               <a:rPr sz="1400" b="0" i="0">
                 <a:solidFill>
@@ -15291,17 +15582,25 @@
                 </a:solidFill>
                 <a:latin typeface="Calibri"/>
               </a:rPr>
-              <a:t>Intent-based profile feed: dating or friendship, at your college and nearby</a:t>
+              <a:t>dating or friendship, at your college and nearby</a:t>
             </a:r>
           </a:p>
           <a:p>
             <a:pPr marL="164592" indent="-164592">
               <a:spcAft>
-                <a:spcPts val="400"/>
+                <a:spcPts val="700"/>
               </a:spcAft>
-              <a:buFont typeface="Arial"/>
-              <a:buChar char="•"/>
+              <a:buNone/>
             </a:pPr>
+            <a:r>
+              <a:rPr sz="1400" b="1" i="0">
+                <a:solidFill>
+                  <a:srgbClr val="C0392B"/>
+                </a:solidFill>
+                <a:latin typeface="Calibri"/>
+              </a:rPr>
+              <a:t>Live video matching: </a:t>
+            </a:r>
             <a:r>
               <a:rPr sz="1400" b="0" i="0">
                 <a:solidFill>
@@ -15309,17 +15608,25 @@
                 </a:solidFill>
                 <a:latin typeface="Calibri"/>
               </a:rPr>
-              <a:t>Instant live video matching: tap once, meet a new verified student face to face</a:t>
+              <a:t>tap once, meet a new verified student face to face</a:t>
             </a:r>
           </a:p>
           <a:p>
             <a:pPr marL="164592" indent="-164592">
               <a:spcAft>
-                <a:spcPts val="400"/>
+                <a:spcPts val="700"/>
               </a:spcAft>
-              <a:buFont typeface="Arial"/>
-              <a:buChar char="•"/>
+              <a:buNone/>
             </a:pPr>
+            <a:r>
+              <a:rPr sz="1400" b="1" i="0">
+                <a:solidFill>
+                  <a:srgbClr val="C0392B"/>
+                </a:solidFill>
+                <a:latin typeface="Calibri"/>
+              </a:rPr>
+              <a:t>Omegle-style spontaneity — </a:t>
+            </a:r>
             <a:r>
               <a:rPr sz="1400" b="0" i="0">
                 <a:solidFill>
@@ -15327,7 +15634,7 @@
                 </a:solidFill>
                 <a:latin typeface="Calibri"/>
               </a:rPr>
-              <a:t>The spontaneous Omegle-style experience — but only with real students</a:t>
+              <a:t>but only with real students</a:t>
             </a:r>
           </a:p>
           <a:p>
@@ -15335,9 +15642,17 @@
               <a:spcAft>
                 <a:spcPts val="800"/>
               </a:spcAft>
-              <a:buFont typeface="Arial"/>
-              <a:buChar char="•"/>
+              <a:buNone/>
             </a:pPr>
+            <a:r>
+              <a:rPr sz="1400" b="1" i="0">
+                <a:solidFill>
+                  <a:srgbClr val="C0392B"/>
+                </a:solidFill>
+                <a:latin typeface="Calibri"/>
+              </a:rPr>
+              <a:t>Status: </a:t>
+            </a:r>
             <a:r>
               <a:rPr sz="1400" b="0" i="0">
                 <a:solidFill>
@@ -15345,7 +15660,7 @@
                 </a:solidFill>
                 <a:latin typeface="Calibri"/>
               </a:rPr>
-              <a:t>Working product in testing; launching November 2026 with all features</a:t>
+              <a:t>working product in testing; launching November 2026 with all features.</a:t>
             </a:r>
           </a:p>
           <a:p>
@@ -15355,9 +15670,9 @@
               </a:spcAft>
             </a:pPr>
             <a:r>
-              <a:rPr sz="1350" b="1" i="0">
+              <a:rPr sz="1400" b="1" i="0">
                 <a:solidFill>
-                  <a:srgbClr val="262626"/>
+                  <a:srgbClr val="C0392B"/>
                 </a:solidFill>
                 <a:latin typeface="Calibri"/>
               </a:rPr>
@@ -15375,11 +15690,11 @@
         <p:spPr>
           <a:xfrm>
             <a:off x="3474720" y="4709160"/>
-            <a:ext cx="1572768" cy="868680"/>
+            <a:ext cx="1572768" cy="914400"/>
           </a:xfrm>
           <a:prstGeom prst="roundRect">
             <a:avLst>
-              <a:gd name="adj" fmla="val 12000"/>
+              <a:gd name="adj" fmla="val 10000"/>
             </a:avLst>
           </a:prstGeom>
           <a:solidFill>
@@ -15387,7 +15702,7 @@
           </a:solidFill>
           <a:ln w="12700">
             <a:solidFill>
-              <a:srgbClr val="B3B3B3"/>
+              <a:srgbClr val="C0392B"/>
             </a:solidFill>
           </a:ln>
         </p:spPr>
@@ -15406,7 +15721,7 @@
           </a:fontRef>
         </p:style>
         <p:txBody>
-          <a:bodyPr rtlCol="0" anchor="ctr" wrap="square" lIns="73152" rIns="73152" tIns="36576" bIns="36576"/>
+          <a:bodyPr rtlCol="0" anchor="ctr" wrap="square" lIns="109728" rIns="109728" tIns="73152" bIns="73152"/>
           <a:lstStyle/>
           <a:p>
             <a:pPr algn="ctr">
@@ -15415,9 +15730,9 @@
               </a:spcAft>
             </a:pPr>
             <a:r>
-              <a:rPr sz="1300" b="1" i="0">
+              <a:rPr sz="1350" b="1" i="0">
                 <a:solidFill>
-                  <a:srgbClr val="262626"/>
+                  <a:srgbClr val="C0392B"/>
                 </a:solidFill>
                 <a:latin typeface="Calibri"/>
               </a:rPr>
@@ -15431,7 +15746,7 @@
               </a:spcAft>
             </a:pPr>
             <a:r>
-              <a:rPr sz="1200" b="0" i="0">
+              <a:rPr sz="1250" b="0" i="0">
                 <a:solidFill>
                   <a:srgbClr val="595959"/>
                 </a:solidFill>
@@ -15450,7 +15765,7 @@
         </p:nvSpPr>
         <p:spPr>
           <a:xfrm>
-            <a:off x="5065776" y="4956048"/>
+            <a:off x="5065776" y="5029200"/>
             <a:ext cx="237744" cy="365760"/>
           </a:xfrm>
           <a:prstGeom prst="rect">
@@ -15472,7 +15787,7 @@
             <a:r>
               <a:rPr sz="1600" b="1" i="0">
                 <a:solidFill>
-                  <a:srgbClr val="595959"/>
+                  <a:srgbClr val="C0392B"/>
                 </a:solidFill>
                 <a:latin typeface="Calibri"/>
               </a:rPr>
@@ -15490,11 +15805,11 @@
         <p:spPr>
           <a:xfrm>
             <a:off x="5303520" y="4709160"/>
-            <a:ext cx="1572768" cy="868680"/>
+            <a:ext cx="1572768" cy="914400"/>
           </a:xfrm>
           <a:prstGeom prst="roundRect">
             <a:avLst>
-              <a:gd name="adj" fmla="val 12000"/>
+              <a:gd name="adj" fmla="val 10000"/>
             </a:avLst>
           </a:prstGeom>
           <a:solidFill>
@@ -15502,7 +15817,7 @@
           </a:solidFill>
           <a:ln w="12700">
             <a:solidFill>
-              <a:srgbClr val="B3B3B3"/>
+              <a:srgbClr val="C0392B"/>
             </a:solidFill>
           </a:ln>
         </p:spPr>
@@ -15521,7 +15836,7 @@
           </a:fontRef>
         </p:style>
         <p:txBody>
-          <a:bodyPr rtlCol="0" anchor="ctr" wrap="square" lIns="73152" rIns="73152" tIns="36576" bIns="36576"/>
+          <a:bodyPr rtlCol="0" anchor="ctr" wrap="square" lIns="109728" rIns="109728" tIns="73152" bIns="73152"/>
           <a:lstStyle/>
           <a:p>
             <a:pPr algn="ctr">
@@ -15530,9 +15845,9 @@
               </a:spcAft>
             </a:pPr>
             <a:r>
-              <a:rPr sz="1300" b="1" i="0">
+              <a:rPr sz="1350" b="1" i="0">
                 <a:solidFill>
-                  <a:srgbClr val="262626"/>
+                  <a:srgbClr val="C0392B"/>
                 </a:solidFill>
                 <a:latin typeface="Calibri"/>
               </a:rPr>
@@ -15546,7 +15861,7 @@
               </a:spcAft>
             </a:pPr>
             <a:r>
-              <a:rPr sz="1200" b="0" i="0">
+              <a:rPr sz="1250" b="0" i="0">
                 <a:solidFill>
                   <a:srgbClr val="595959"/>
                 </a:solidFill>
@@ -15565,7 +15880,7 @@
         </p:nvSpPr>
         <p:spPr>
           <a:xfrm>
-            <a:off x="6894576" y="4956048"/>
+            <a:off x="6894576" y="5029200"/>
             <a:ext cx="237744" cy="365760"/>
           </a:xfrm>
           <a:prstGeom prst="rect">
@@ -15587,7 +15902,7 @@
             <a:r>
               <a:rPr sz="1600" b="1" i="0">
                 <a:solidFill>
-                  <a:srgbClr val="595959"/>
+                  <a:srgbClr val="C0392B"/>
                 </a:solidFill>
                 <a:latin typeface="Calibri"/>
               </a:rPr>
@@ -15605,11 +15920,11 @@
         <p:spPr>
           <a:xfrm>
             <a:off x="7132320" y="4709160"/>
-            <a:ext cx="1572768" cy="868680"/>
+            <a:ext cx="1572768" cy="914400"/>
           </a:xfrm>
           <a:prstGeom prst="roundRect">
             <a:avLst>
-              <a:gd name="adj" fmla="val 12000"/>
+              <a:gd name="adj" fmla="val 10000"/>
             </a:avLst>
           </a:prstGeom>
           <a:solidFill>
@@ -15617,7 +15932,7 @@
           </a:solidFill>
           <a:ln w="12700">
             <a:solidFill>
-              <a:srgbClr val="B3B3B3"/>
+              <a:srgbClr val="C0392B"/>
             </a:solidFill>
           </a:ln>
         </p:spPr>
@@ -15636,7 +15951,7 @@
           </a:fontRef>
         </p:style>
         <p:txBody>
-          <a:bodyPr rtlCol="0" anchor="ctr" wrap="square" lIns="73152" rIns="73152" tIns="36576" bIns="36576"/>
+          <a:bodyPr rtlCol="0" anchor="ctr" wrap="square" lIns="109728" rIns="109728" tIns="73152" bIns="73152"/>
           <a:lstStyle/>
           <a:p>
             <a:pPr algn="ctr">
@@ -15645,9 +15960,9 @@
               </a:spcAft>
             </a:pPr>
             <a:r>
-              <a:rPr sz="1300" b="1" i="0">
+              <a:rPr sz="1350" b="1" i="0">
                 <a:solidFill>
-                  <a:srgbClr val="262626"/>
+                  <a:srgbClr val="C0392B"/>
                 </a:solidFill>
                 <a:latin typeface="Calibri"/>
               </a:rPr>
@@ -15661,7 +15976,7 @@
               </a:spcAft>
             </a:pPr>
             <a:r>
-              <a:rPr sz="1200" b="0" i="0">
+              <a:rPr sz="1250" b="0" i="0">
                 <a:solidFill>
                   <a:srgbClr val="595959"/>
                 </a:solidFill>
@@ -15680,7 +15995,7 @@
         </p:nvSpPr>
         <p:spPr>
           <a:xfrm>
-            <a:off x="3474720" y="5715000"/>
+            <a:off x="3474720" y="5806440"/>
             <a:ext cx="5212080" cy="457200"/>
           </a:xfrm>
           <a:prstGeom prst="rect">
@@ -16367,7 +16682,7 @@
         <p:spPr>
           <a:xfrm>
             <a:off x="3474720" y="685800"/>
-            <a:ext cx="5212080" cy="1051560"/>
+            <a:ext cx="5212080" cy="1097280"/>
           </a:xfrm>
           <a:prstGeom prst="rect">
             <a:avLst/>
@@ -16382,11 +16697,11 @@
           <a:p>
             <a:pPr>
               <a:spcAft>
-                <a:spcPts val="600"/>
+                <a:spcPts val="500"/>
               </a:spcAft>
             </a:pPr>
             <a:r>
-              <a:rPr sz="1500" b="1" i="0">
+              <a:rPr sz="1700" b="1" i="0">
                 <a:solidFill>
                   <a:srgbClr val="262626"/>
                 </a:solidFill>
@@ -16394,17 +16709,10 @@
               </a:rPr>
               <a:t>Hypothesis: a verified, students-only network earns students’ trust — and their time.</a:t>
             </a:r>
-          </a:p>
-          <a:p>
-            <a:pPr>
-              <a:spcAft>
-                <a:spcPts val="0"/>
-              </a:spcAft>
-            </a:pPr>
             <a:r>
               <a:rPr sz="1350" b="1" i="0">
                 <a:solidFill>
-                  <a:srgbClr val="262626"/>
+                  <a:srgbClr val="C0392B"/>
                 </a:solidFill>
                 <a:latin typeface="Calibri"/>
               </a:rPr>
@@ -16421,20 +16729,20 @@
         </p:nvSpPr>
         <p:spPr>
           <a:xfrm>
-            <a:off x="3474720" y="1920240"/>
-            <a:ext cx="2514600" cy="1051560"/>
+            <a:off x="3474720" y="1965960"/>
+            <a:ext cx="2514600" cy="1069848"/>
           </a:xfrm>
           <a:prstGeom prst="roundRect">
             <a:avLst>
-              <a:gd name="adj" fmla="val 12000"/>
+              <a:gd name="adj" fmla="val 10000"/>
             </a:avLst>
           </a:prstGeom>
           <a:solidFill>
-            <a:srgbClr val="FFFFFF"/>
+            <a:srgbClr val="FAEEEC"/>
           </a:solidFill>
           <a:ln w="12700">
             <a:solidFill>
-              <a:srgbClr val="B3B3B3"/>
+              <a:srgbClr val="FAEEEC"/>
             </a:solidFill>
           </a:ln>
         </p:spPr>
@@ -16453,7 +16761,7 @@
           </a:fontRef>
         </p:style>
         <p:txBody>
-          <a:bodyPr rtlCol="0" anchor="ctr" wrap="square" lIns="73152" rIns="73152" tIns="36576" bIns="36576"/>
+          <a:bodyPr rtlCol="0" anchor="ctr" wrap="square" lIns="109728" rIns="109728" tIns="73152" bIns="73152"/>
           <a:lstStyle/>
           <a:p>
             <a:pPr algn="ctr">
@@ -16462,9 +16770,9 @@
               </a:spcAft>
             </a:pPr>
             <a:r>
-              <a:rPr sz="2400" b="1" i="0">
+              <a:rPr sz="2600" b="1" i="0">
                 <a:solidFill>
-                  <a:srgbClr val="262626"/>
+                  <a:srgbClr val="C0392B"/>
                 </a:solidFill>
                 <a:latin typeface="Calibri"/>
               </a:rPr>
@@ -16497,20 +16805,20 @@
         </p:nvSpPr>
         <p:spPr>
           <a:xfrm>
-            <a:off x="6172200" y="1920240"/>
-            <a:ext cx="2514600" cy="1051560"/>
+            <a:off x="6172200" y="1965960"/>
+            <a:ext cx="2514600" cy="1069848"/>
           </a:xfrm>
           <a:prstGeom prst="roundRect">
             <a:avLst>
-              <a:gd name="adj" fmla="val 12000"/>
+              <a:gd name="adj" fmla="val 10000"/>
             </a:avLst>
           </a:prstGeom>
           <a:solidFill>
-            <a:srgbClr val="FFFFFF"/>
+            <a:srgbClr val="FAEEEC"/>
           </a:solidFill>
           <a:ln w="12700">
             <a:solidFill>
-              <a:srgbClr val="B3B3B3"/>
+              <a:srgbClr val="FAEEEC"/>
             </a:solidFill>
           </a:ln>
         </p:spPr>
@@ -16529,7 +16837,7 @@
           </a:fontRef>
         </p:style>
         <p:txBody>
-          <a:bodyPr rtlCol="0" anchor="ctr" wrap="square" lIns="73152" rIns="73152" tIns="36576" bIns="36576"/>
+          <a:bodyPr rtlCol="0" anchor="ctr" wrap="square" lIns="109728" rIns="109728" tIns="73152" bIns="73152"/>
           <a:lstStyle/>
           <a:p>
             <a:pPr algn="ctr">
@@ -16538,9 +16846,9 @@
               </a:spcAft>
             </a:pPr>
             <a:r>
-              <a:rPr sz="2400" b="1" i="0">
+              <a:rPr sz="2600" b="1" i="0">
                 <a:solidFill>
-                  <a:srgbClr val="262626"/>
+                  <a:srgbClr val="C0392B"/>
                 </a:solidFill>
                 <a:latin typeface="Calibri"/>
               </a:rPr>
@@ -16573,20 +16881,20 @@
         </p:nvSpPr>
         <p:spPr>
           <a:xfrm>
-            <a:off x="3474720" y="3108960"/>
-            <a:ext cx="2514600" cy="1051560"/>
+            <a:off x="3474720" y="3172968"/>
+            <a:ext cx="2514600" cy="1069848"/>
           </a:xfrm>
           <a:prstGeom prst="roundRect">
             <a:avLst>
-              <a:gd name="adj" fmla="val 12000"/>
+              <a:gd name="adj" fmla="val 10000"/>
             </a:avLst>
           </a:prstGeom>
           <a:solidFill>
-            <a:srgbClr val="FFFFFF"/>
+            <a:srgbClr val="FAEEEC"/>
           </a:solidFill>
           <a:ln w="12700">
             <a:solidFill>
-              <a:srgbClr val="B3B3B3"/>
+              <a:srgbClr val="FAEEEC"/>
             </a:solidFill>
           </a:ln>
         </p:spPr>
@@ -16605,7 +16913,7 @@
           </a:fontRef>
         </p:style>
         <p:txBody>
-          <a:bodyPr rtlCol="0" anchor="ctr" wrap="square" lIns="73152" rIns="73152" tIns="36576" bIns="36576"/>
+          <a:bodyPr rtlCol="0" anchor="ctr" wrap="square" lIns="109728" rIns="109728" tIns="73152" bIns="73152"/>
           <a:lstStyle/>
           <a:p>
             <a:pPr algn="ctr">
@@ -16614,9 +16922,9 @@
               </a:spcAft>
             </a:pPr>
             <a:r>
-              <a:rPr sz="2400" b="1" i="0">
+              <a:rPr sz="2600" b="1" i="0">
                 <a:solidFill>
-                  <a:srgbClr val="262626"/>
+                  <a:srgbClr val="C0392B"/>
                 </a:solidFill>
                 <a:latin typeface="Calibri"/>
               </a:rPr>
@@ -16649,20 +16957,20 @@
         </p:nvSpPr>
         <p:spPr>
           <a:xfrm>
-            <a:off x="6172200" y="3108960"/>
-            <a:ext cx="2514600" cy="1051560"/>
+            <a:off x="6172200" y="3172968"/>
+            <a:ext cx="2514600" cy="1069848"/>
           </a:xfrm>
           <a:prstGeom prst="roundRect">
             <a:avLst>
-              <a:gd name="adj" fmla="val 12000"/>
+              <a:gd name="adj" fmla="val 10000"/>
             </a:avLst>
           </a:prstGeom>
           <a:solidFill>
-            <a:srgbClr val="FFFFFF"/>
+            <a:srgbClr val="FAEEEC"/>
           </a:solidFill>
           <a:ln w="12700">
             <a:solidFill>
-              <a:srgbClr val="B3B3B3"/>
+              <a:srgbClr val="FAEEEC"/>
             </a:solidFill>
           </a:ln>
         </p:spPr>
@@ -16681,7 +16989,7 @@
           </a:fontRef>
         </p:style>
         <p:txBody>
-          <a:bodyPr rtlCol="0" anchor="ctr" wrap="square" lIns="73152" rIns="73152" tIns="36576" bIns="36576"/>
+          <a:bodyPr rtlCol="0" anchor="ctr" wrap="square" lIns="109728" rIns="109728" tIns="73152" bIns="73152"/>
           <a:lstStyle/>
           <a:p>
             <a:pPr algn="ctr">
@@ -16690,9 +16998,9 @@
               </a:spcAft>
             </a:pPr>
             <a:r>
-              <a:rPr sz="2400" b="1" i="0">
+              <a:rPr sz="2600" b="1" i="0">
                 <a:solidFill>
-                  <a:srgbClr val="262626"/>
+                  <a:srgbClr val="C0392B"/>
                 </a:solidFill>
                 <a:latin typeface="Calibri"/>
               </a:rPr>
@@ -16725,7 +17033,7 @@
         </p:nvSpPr>
         <p:spPr>
           <a:xfrm>
-            <a:off x="3474720" y="4434840"/>
+            <a:off x="3474720" y="4526280"/>
             <a:ext cx="5212080" cy="1783080"/>
           </a:xfrm>
           <a:prstGeom prst="rect">
@@ -16741,13 +17049,13 @@
           <a:p>
             <a:pPr>
               <a:spcAft>
-                <a:spcPts val="400"/>
+                <a:spcPts val="500"/>
               </a:spcAft>
             </a:pPr>
             <a:r>
               <a:rPr sz="1350" b="1" i="0">
                 <a:solidFill>
-                  <a:srgbClr val="262626"/>
+                  <a:srgbClr val="C0392B"/>
                 </a:solidFill>
                 <a:latin typeface="Calibri"/>
               </a:rPr>
@@ -16757,8 +17065,41 @@
           <a:p>
             <a:pPr marL="164592" indent="-164592">
               <a:spcAft>
-                <a:spcPts val="400"/>
+                <a:spcPts val="500"/>
               </a:spcAft>
+              <a:buClr>
+                <a:srgbClr val="C0392B"/>
+              </a:buClr>
+              <a:buFont typeface="Arial"/>
+              <a:buChar char="•"/>
+            </a:pPr>
+            <a:r>
+              <a:rPr sz="1400" b="1" i="0">
+                <a:solidFill>
+                  <a:srgbClr val="C0392B"/>
+                </a:solidFill>
+                <a:latin typeface="Calibri"/>
+              </a:rPr>
+              <a:t>4.5 crore </a:t>
+            </a:r>
+            <a:r>
+              <a:rPr sz="1400" b="0" i="0">
+                <a:solidFill>
+                  <a:srgbClr val="262626"/>
+                </a:solidFill>
+                <a:latin typeface="Calibri"/>
+              </a:rPr>
+              <a:t>higher-education students in India (AISHE 2023-24)</a:t>
+            </a:r>
+          </a:p>
+          <a:p>
+            <a:pPr marL="164592" indent="-164592">
+              <a:spcAft>
+                <a:spcPts val="500"/>
+              </a:spcAft>
+              <a:buClr>
+                <a:srgbClr val="C0392B"/>
+              </a:buClr>
               <a:buFont typeface="Arial"/>
               <a:buChar char="•"/>
             </a:pPr>
@@ -16769,14 +17110,26 @@
                 </a:solidFill>
                 <a:latin typeface="Calibri"/>
               </a:rPr>
-              <a:t>4.5 crore higher-education students in India (AISHE 2023-24)</a:t>
+              <a:t>10% on dating apps (Mumbai study: 12.7%) x 5% paying x Rs 1,500/yr ≈ </a:t>
+            </a:r>
+            <a:r>
+              <a:rPr sz="1400" b="1" i="0">
+                <a:solidFill>
+                  <a:srgbClr val="C0392B"/>
+                </a:solidFill>
+                <a:latin typeface="Calibri"/>
+              </a:rPr>
+              <a:t>Rs 34 crore/yr</a:t>
             </a:r>
           </a:p>
           <a:p>
             <a:pPr marL="164592" indent="-164592">
               <a:spcAft>
-                <a:spcPts val="400"/>
+                <a:spcPts val="0"/>
               </a:spcAft>
+              <a:buClr>
+                <a:srgbClr val="C0392B"/>
+              </a:buClr>
               <a:buFont typeface="Arial"/>
               <a:buChar char="•"/>
             </a:pPr>
@@ -16787,17 +17140,17 @@
                 </a:solidFill>
                 <a:latin typeface="Calibri"/>
               </a:rPr>
-              <a:t>10% on dating apps (Mumbai study: 12.7%) x 5% paying x Rs 1,500/yr ≈ Rs 34 crore/yr</a:t>
+              <a:t>Context: India’s online-dating market est. </a:t>
             </a:r>
-          </a:p>
-          <a:p>
-            <a:pPr marL="164592" indent="-164592">
-              <a:spcAft>
-                <a:spcPts val="0"/>
-              </a:spcAft>
-              <a:buFont typeface="Arial"/>
-              <a:buChar char="•"/>
-            </a:pPr>
+            <a:r>
+              <a:rPr sz="1400" b="1" i="0">
+                <a:solidFill>
+                  <a:srgbClr val="C0392B"/>
+                </a:solidFill>
+                <a:latin typeface="Calibri"/>
+              </a:rPr>
+              <a:t>US$548M </a:t>
+            </a:r>
             <a:r>
               <a:rPr sz="1400" b="0" i="0">
                 <a:solidFill>
@@ -16805,7 +17158,7 @@
                 </a:solidFill>
                 <a:latin typeface="Calibri"/>
               </a:rPr>
-              <a:t>Context: India’s online-dating market est. US$548M (Grand View Research, 2023)</a:t>
+              <a:t>(Grand View Research, 2023)</a:t>
             </a:r>
           </a:p>
         </p:txBody>
@@ -17436,7 +17789,7 @@
         <p:spPr>
           <a:xfrm>
             <a:off x="3840480" y="548640"/>
-            <a:ext cx="4663440" cy="2788920"/>
+            <a:ext cx="4663440" cy="320040"/>
           </a:xfrm>
           <a:prstGeom prst="rect">
             <a:avLst/>
@@ -17451,35 +17804,100 @@
           <a:p>
             <a:pPr>
               <a:spcAft>
-                <a:spcPts val="400"/>
+                <a:spcPts val="500"/>
               </a:spcAft>
             </a:pPr>
             <a:r>
               <a:rPr sz="1350" b="1" i="0">
                 <a:solidFill>
-                  <a:srgbClr val="262626"/>
+                  <a:srgbClr val="C0392B"/>
                 </a:solidFill>
                 <a:latin typeface="Calibri"/>
               </a:rPr>
               <a:t>Milestones</a:t>
             </a:r>
           </a:p>
+        </p:txBody>
+      </p:sp>
+      <p:sp>
+        <p:nvSpPr>
+          <p:cNvPr id="12" name="Rectangle 11"/>
+          <p:cNvSpPr/>
+          <p:nvPr/>
+        </p:nvSpPr>
+        <p:spPr>
+          <a:xfrm>
+            <a:off x="3954780" y="996696"/>
+            <a:ext cx="12801" cy="1636776"/>
+          </a:xfrm>
+          <a:prstGeom prst="rect">
+            <a:avLst/>
+          </a:prstGeom>
+          <a:solidFill>
+            <a:srgbClr val="C0392B"/>
+          </a:solidFill>
+          <a:ln>
+            <a:noFill/>
+          </a:ln>
+        </p:spPr>
+        <p:style>
+          <a:lnRef idx="1">
+            <a:schemeClr val="accent1"/>
+          </a:lnRef>
+          <a:fillRef idx="3">
+            <a:schemeClr val="accent1"/>
+          </a:fillRef>
+          <a:effectRef idx="2">
+            <a:schemeClr val="accent1"/>
+          </a:effectRef>
+          <a:fontRef idx="minor">
+            <a:schemeClr val="lt1"/>
+          </a:fontRef>
+        </p:style>
+        <p:txBody>
+          <a:bodyPr rtlCol="0" anchor="ctr"/>
+          <a:lstStyle/>
+          <a:p>
+            <a:pPr algn="ctr"/>
+          </a:p>
+        </p:txBody>
+      </p:sp>
+      <p:sp>
+        <p:nvSpPr>
+          <p:cNvPr id="13" name="TextBox 12"/>
+          <p:cNvSpPr txBox="1"/>
+          <p:nvPr/>
+        </p:nvSpPr>
+        <p:spPr>
+          <a:xfrm>
+            <a:off x="4160520" y="896112"/>
+            <a:ext cx="4343400" cy="475488"/>
+          </a:xfrm>
+          <a:prstGeom prst="rect">
+            <a:avLst/>
+          </a:prstGeom>
+          <a:noFill/>
+        </p:spPr>
+        <p:txBody>
+          <a:bodyPr wrap="square">
+            <a:spAutoFit/>
+          </a:bodyPr>
+          <a:lstStyle/>
           <a:p>
             <a:pPr marL="164592" indent="-164592">
               <a:spcAft>
-                <a:spcPts val="300"/>
+                <a:spcPts val="0"/>
               </a:spcAft>
-              <a:buFont typeface="Arial"/>
-              <a:buChar char="•"/>
+              <a:buNone/>
             </a:pPr>
             <a:r>
               <a:rPr sz="1300" b="1" i="0">
                 <a:solidFill>
-                  <a:srgbClr val="262626"/>
+                  <a:srgbClr val="C0392B"/>
                 </a:solidFill>
                 <a:latin typeface="Calibri"/>
               </a:rPr>
-              <a:t>Build (Oct 2026): </a:t>
+              <a:t>Oct 2026 — Build: </a:t>
             </a:r>
             <a:r>
               <a:rPr sz="1300" b="0" i="0">
@@ -17491,22 +17909,89 @@
               <a:t>finish live video matching, selfie-ID verification, reporting, blocking and skip</a:t>
             </a:r>
           </a:p>
+        </p:txBody>
+      </p:sp>
+      <p:sp>
+        <p:nvSpPr>
+          <p:cNvPr id="14" name="Oval 13"/>
+          <p:cNvSpPr/>
+          <p:nvPr/>
+        </p:nvSpPr>
+        <p:spPr>
+          <a:xfrm>
+            <a:off x="3901744" y="1001268"/>
+            <a:ext cx="118872" cy="118872"/>
+          </a:xfrm>
+          <a:prstGeom prst="ellipse">
+            <a:avLst/>
+          </a:prstGeom>
+          <a:solidFill>
+            <a:srgbClr val="C0392B"/>
+          </a:solidFill>
+          <a:ln w="12700">
+            <a:solidFill>
+              <a:srgbClr val="FFFFFF"/>
+            </a:solidFill>
+          </a:ln>
+        </p:spPr>
+        <p:style>
+          <a:lnRef idx="1">
+            <a:schemeClr val="accent1"/>
+          </a:lnRef>
+          <a:fillRef idx="3">
+            <a:schemeClr val="accent1"/>
+          </a:fillRef>
+          <a:effectRef idx="2">
+            <a:schemeClr val="accent1"/>
+          </a:effectRef>
+          <a:fontRef idx="minor">
+            <a:schemeClr val="lt1"/>
+          </a:fontRef>
+        </p:style>
+        <p:txBody>
+          <a:bodyPr rtlCol="0" anchor="ctr"/>
+          <a:lstStyle/>
+          <a:p>
+            <a:pPr algn="ctr"/>
+          </a:p>
+        </p:txBody>
+      </p:sp>
+      <p:sp>
+        <p:nvSpPr>
+          <p:cNvPr id="15" name="TextBox 14"/>
+          <p:cNvSpPr txBox="1"/>
+          <p:nvPr/>
+        </p:nvSpPr>
+        <p:spPr>
+          <a:xfrm>
+            <a:off x="4160520" y="1481328"/>
+            <a:ext cx="4343400" cy="274320"/>
+          </a:xfrm>
+          <a:prstGeom prst="rect">
+            <a:avLst/>
+          </a:prstGeom>
+          <a:noFill/>
+        </p:spPr>
+        <p:txBody>
+          <a:bodyPr wrap="square">
+            <a:spAutoFit/>
+          </a:bodyPr>
+          <a:lstStyle/>
           <a:p>
             <a:pPr marL="164592" indent="-164592">
               <a:spcAft>
-                <a:spcPts val="300"/>
+                <a:spcPts val="0"/>
               </a:spcAft>
-              <a:buFont typeface="Arial"/>
-              <a:buChar char="•"/>
+              <a:buNone/>
             </a:pPr>
             <a:r>
               <a:rPr sz="1300" b="1" i="0">
                 <a:solidFill>
-                  <a:srgbClr val="262626"/>
+                  <a:srgbClr val="C0392B"/>
                 </a:solidFill>
                 <a:latin typeface="Calibri"/>
               </a:rPr>
-              <a:t>Test &amp; launch (Nov 2026): </a:t>
+              <a:t>Nov 2026 — Test &amp; launch: </a:t>
             </a:r>
             <a:r>
               <a:rPr sz="1300" b="0" i="0">
@@ -17518,22 +18003,89 @@
               <a:t>all features, live to students across colleges</a:t>
             </a:r>
           </a:p>
+        </p:txBody>
+      </p:sp>
+      <p:sp>
+        <p:nvSpPr>
+          <p:cNvPr id="16" name="Oval 15"/>
+          <p:cNvSpPr/>
+          <p:nvPr/>
+        </p:nvSpPr>
+        <p:spPr>
+          <a:xfrm>
+            <a:off x="3901744" y="1586484"/>
+            <a:ext cx="118872" cy="118872"/>
+          </a:xfrm>
+          <a:prstGeom prst="ellipse">
+            <a:avLst/>
+          </a:prstGeom>
+          <a:solidFill>
+            <a:srgbClr val="C0392B"/>
+          </a:solidFill>
+          <a:ln w="12700">
+            <a:solidFill>
+              <a:srgbClr val="FFFFFF"/>
+            </a:solidFill>
+          </a:ln>
+        </p:spPr>
+        <p:style>
+          <a:lnRef idx="1">
+            <a:schemeClr val="accent1"/>
+          </a:lnRef>
+          <a:fillRef idx="3">
+            <a:schemeClr val="accent1"/>
+          </a:fillRef>
+          <a:effectRef idx="2">
+            <a:schemeClr val="accent1"/>
+          </a:effectRef>
+          <a:fontRef idx="minor">
+            <a:schemeClr val="lt1"/>
+          </a:fontRef>
+        </p:style>
+        <p:txBody>
+          <a:bodyPr rtlCol="0" anchor="ctr"/>
+          <a:lstStyle/>
+          <a:p>
+            <a:pPr algn="ctr"/>
+          </a:p>
+        </p:txBody>
+      </p:sp>
+      <p:sp>
+        <p:nvSpPr>
+          <p:cNvPr id="17" name="TextBox 16"/>
+          <p:cNvSpPr txBox="1"/>
+          <p:nvPr/>
+        </p:nvSpPr>
+        <p:spPr>
+          <a:xfrm>
+            <a:off x="4160520" y="1920240"/>
+            <a:ext cx="4343400" cy="475488"/>
+          </a:xfrm>
+          <a:prstGeom prst="rect">
+            <a:avLst/>
+          </a:prstGeom>
+          <a:noFill/>
+        </p:spPr>
+        <p:txBody>
+          <a:bodyPr wrap="square">
+            <a:spAutoFit/>
+          </a:bodyPr>
+          <a:lstStyle/>
           <a:p>
             <a:pPr marL="164592" indent="-164592">
               <a:spcAft>
-                <a:spcPts val="300"/>
+                <a:spcPts val="0"/>
               </a:spcAft>
-              <a:buFont typeface="Arial"/>
-              <a:buChar char="•"/>
+              <a:buNone/>
             </a:pPr>
             <a:r>
               <a:rPr sz="1300" b="1" i="0">
                 <a:solidFill>
-                  <a:srgbClr val="262626"/>
+                  <a:srgbClr val="C0392B"/>
                 </a:solidFill>
                 <a:latin typeface="Calibri"/>
               </a:rPr>
-              <a:t>Iterate &amp; earn (Dec 2026): </a:t>
+              <a:t>Dec 2026 — Iterate &amp; earn: </a:t>
             </a:r>
             <a:r>
               <a:rPr sz="1300" b="0" i="0">
@@ -17545,18 +18097,85 @@
               <a:t>marketing at Mood Indigo and Techfest; monetization starts</a:t>
             </a:r>
           </a:p>
+        </p:txBody>
+      </p:sp>
+      <p:sp>
+        <p:nvSpPr>
+          <p:cNvPr id="18" name="Oval 17"/>
+          <p:cNvSpPr/>
+          <p:nvPr/>
+        </p:nvSpPr>
+        <p:spPr>
+          <a:xfrm>
+            <a:off x="3901744" y="2025396"/>
+            <a:ext cx="118872" cy="118872"/>
+          </a:xfrm>
+          <a:prstGeom prst="ellipse">
+            <a:avLst/>
+          </a:prstGeom>
+          <a:solidFill>
+            <a:srgbClr val="C0392B"/>
+          </a:solidFill>
+          <a:ln w="12700">
+            <a:solidFill>
+              <a:srgbClr val="FFFFFF"/>
+            </a:solidFill>
+          </a:ln>
+        </p:spPr>
+        <p:style>
+          <a:lnRef idx="1">
+            <a:schemeClr val="accent1"/>
+          </a:lnRef>
+          <a:fillRef idx="3">
+            <a:schemeClr val="accent1"/>
+          </a:fillRef>
+          <a:effectRef idx="2">
+            <a:schemeClr val="accent1"/>
+          </a:effectRef>
+          <a:fontRef idx="minor">
+            <a:schemeClr val="lt1"/>
+          </a:fontRef>
+        </p:style>
+        <p:txBody>
+          <a:bodyPr rtlCol="0" anchor="ctr"/>
+          <a:lstStyle/>
+          <a:p>
+            <a:pPr algn="ctr"/>
+          </a:p>
+        </p:txBody>
+      </p:sp>
+      <p:sp>
+        <p:nvSpPr>
+          <p:cNvPr id="19" name="TextBox 18"/>
+          <p:cNvSpPr txBox="1"/>
+          <p:nvPr/>
+        </p:nvSpPr>
+        <p:spPr>
+          <a:xfrm>
+            <a:off x="4160520" y="2523744"/>
+            <a:ext cx="4343400" cy="274320"/>
+          </a:xfrm>
+          <a:prstGeom prst="rect">
+            <a:avLst/>
+          </a:prstGeom>
+          <a:noFill/>
+        </p:spPr>
+        <p:txBody>
+          <a:bodyPr wrap="square">
+            <a:spAutoFit/>
+          </a:bodyPr>
+          <a:lstStyle/>
           <a:p>
             <a:pPr marL="164592" indent="-164592">
               <a:spcAft>
-                <a:spcPts val="800"/>
+                <a:spcPts val="0"/>
               </a:spcAft>
-              <a:buFont typeface="Arial"/>
-              <a:buChar char="•"/>
+              <a:buNone/>
             </a:pPr>
             <a:r>
               <a:rPr sz="1300" b="1" i="0">
                 <a:solidFill>
-                  <a:srgbClr val="262626"/>
+                  <a:srgbClr val="C0392B"/>
                 </a:solidFill>
                 <a:latin typeface="Calibri"/>
               </a:rPr>
@@ -17572,16 +18191,84 @@
               <a:t>new features driven by student feedback</a:t>
             </a:r>
           </a:p>
+        </p:txBody>
+      </p:sp>
+      <p:sp>
+        <p:nvSpPr>
+          <p:cNvPr id="20" name="Oval 19"/>
+          <p:cNvSpPr/>
+          <p:nvPr/>
+        </p:nvSpPr>
+        <p:spPr>
+          <a:xfrm>
+            <a:off x="3901744" y="2628900"/>
+            <a:ext cx="118872" cy="118872"/>
+          </a:xfrm>
+          <a:prstGeom prst="ellipse">
+            <a:avLst/>
+          </a:prstGeom>
+          <a:solidFill>
+            <a:srgbClr val="C0392B"/>
+          </a:solidFill>
+          <a:ln w="12700">
+            <a:solidFill>
+              <a:srgbClr val="FFFFFF"/>
+            </a:solidFill>
+          </a:ln>
+        </p:spPr>
+        <p:style>
+          <a:lnRef idx="1">
+            <a:schemeClr val="accent1"/>
+          </a:lnRef>
+          <a:fillRef idx="3">
+            <a:schemeClr val="accent1"/>
+          </a:fillRef>
+          <a:effectRef idx="2">
+            <a:schemeClr val="accent1"/>
+          </a:effectRef>
+          <a:fontRef idx="minor">
+            <a:schemeClr val="lt1"/>
+          </a:fontRef>
+        </p:style>
+        <p:txBody>
+          <a:bodyPr rtlCol="0" anchor="ctr"/>
+          <a:lstStyle/>
+          <a:p>
+            <a:pPr algn="ctr"/>
+          </a:p>
+        </p:txBody>
+      </p:sp>
+      <p:sp>
+        <p:nvSpPr>
+          <p:cNvPr id="21" name="TextBox 20"/>
+          <p:cNvSpPr txBox="1"/>
+          <p:nvPr/>
+        </p:nvSpPr>
+        <p:spPr>
+          <a:xfrm>
+            <a:off x="3840480" y="2889504"/>
+            <a:ext cx="4663440" cy="777240"/>
+          </a:xfrm>
+          <a:prstGeom prst="rect">
+            <a:avLst/>
+          </a:prstGeom>
+          <a:noFill/>
+        </p:spPr>
+        <p:txBody>
+          <a:bodyPr wrap="square">
+            <a:spAutoFit/>
+          </a:bodyPr>
+          <a:lstStyle/>
           <a:p>
             <a:pPr>
               <a:spcAft>
-                <a:spcPts val="400"/>
+                <a:spcPts val="500"/>
               </a:spcAft>
             </a:pPr>
             <a:r>
               <a:rPr sz="1350" b="1" i="0">
                 <a:solidFill>
-                  <a:srgbClr val="262626"/>
+                  <a:srgbClr val="C0392B"/>
                 </a:solidFill>
                 <a:latin typeface="Calibri"/>
               </a:rPr>
@@ -17593,8 +18280,7 @@
               <a:spcAft>
                 <a:spcPts val="0"/>
               </a:spcAft>
-              <a:buFont typeface="Arial"/>
-              <a:buChar char="•"/>
+              <a:buNone/>
             </a:pPr>
             <a:r>
               <a:rPr sz="1300" b="0" i="0">
@@ -17603,21 +18289,39 @@
                 </a:solidFill>
                 <a:latin typeface="Calibri"/>
               </a:rPr>
-              <a:t>Free to join; premium planned at Rs 1,500/year (assumption, to be tested)</a:t>
+              <a:t>Free to join; premium planned at </a:t>
+            </a:r>
+            <a:r>
+              <a:rPr sz="1300" b="1" i="0">
+                <a:solidFill>
+                  <a:srgbClr val="C0392B"/>
+                </a:solidFill>
+                <a:latin typeface="Calibri"/>
+              </a:rPr>
+              <a:t>Rs 1,500/year </a:t>
+            </a:r>
+            <a:r>
+              <a:rPr sz="1300" b="0" i="0">
+                <a:solidFill>
+                  <a:srgbClr val="262626"/>
+                </a:solidFill>
+                <a:latin typeface="Calibri"/>
+              </a:rPr>
+              <a:t>(assumption, to be tested)</a:t>
             </a:r>
           </a:p>
         </p:txBody>
       </p:sp>
       <p:graphicFrame>
         <p:nvGraphicFramePr>
-          <p:cNvPr id="12" name="Table 11"/>
+          <p:cNvPr id="22" name="Table 21"/>
           <p:cNvGraphicFramePr>
             <a:graphicFrameLocks noGrp="1"/>
           </p:cNvGraphicFramePr>
           <p:nvPr/>
         </p:nvGraphicFramePr>
         <p:xfrm>
-          <a:off x="3840480" y="3474720"/>
+          <a:off x="3840480" y="3730752"/>
           <a:ext cx="4663440" cy="1920240"/>
         </p:xfrm>
         <a:graphic>
@@ -17649,9 +18353,9 @@
                       </a:r>
                     </a:p>
                   </a:txBody>
-                  <a:tcPr marL="54864" marR="54864" marT="18288" marB="18288" anchor="ctr">
+                  <a:tcPr marL="73152" marR="73152" marT="18288" marB="18288" anchor="ctr">
                     <a:solidFill>
-                      <a:srgbClr val="404040"/>
+                      <a:srgbClr val="C0392B"/>
                     </a:solidFill>
                   </a:tcPr>
                 </a:tc>
@@ -17671,9 +18375,9 @@
                       </a:r>
                     </a:p>
                   </a:txBody>
-                  <a:tcPr marL="54864" marR="54864" marT="18288" marB="18288" anchor="ctr">
+                  <a:tcPr marL="73152" marR="73152" marT="18288" marB="18288" anchor="ctr">
                     <a:solidFill>
-                      <a:srgbClr val="404040"/>
+                      <a:srgbClr val="C0392B"/>
                     </a:solidFill>
                   </a:tcPr>
                 </a:tc>
@@ -17693,9 +18397,9 @@
                       </a:r>
                     </a:p>
                   </a:txBody>
-                  <a:tcPr marL="54864" marR="54864" marT="18288" marB="18288" anchor="ctr">
+                  <a:tcPr marL="73152" marR="73152" marT="18288" marB="18288" anchor="ctr">
                     <a:solidFill>
-                      <a:srgbClr val="404040"/>
+                      <a:srgbClr val="C0392B"/>
                     </a:solidFill>
                   </a:tcPr>
                 </a:tc>
@@ -17715,9 +18419,9 @@
                       </a:r>
                     </a:p>
                   </a:txBody>
-                  <a:tcPr marL="54864" marR="54864" marT="18288" marB="18288" anchor="ctr">
+                  <a:tcPr marL="73152" marR="73152" marT="18288" marB="18288" anchor="ctr">
                     <a:solidFill>
-                      <a:srgbClr val="404040"/>
+                      <a:srgbClr val="C0392B"/>
                     </a:solidFill>
                   </a:tcPr>
                 </a:tc>
@@ -17739,7 +18443,11 @@
                       </a:r>
                     </a:p>
                   </a:txBody>
-                  <a:tcPr marL="54864" marR="54864" marT="18288" marB="18288" anchor="ctr"/>
+                  <a:tcPr marL="73152" marR="73152" marT="18288" marB="18288" anchor="ctr">
+                    <a:solidFill>
+                      <a:srgbClr val="FFFFFF"/>
+                    </a:solidFill>
+                  </a:tcPr>
                 </a:tc>
                 <a:tc>
                   <a:txBody>
@@ -17757,7 +18465,11 @@
                       </a:r>
                     </a:p>
                   </a:txBody>
-                  <a:tcPr marL="54864" marR="54864" marT="18288" marB="18288" anchor="ctr"/>
+                  <a:tcPr marL="73152" marR="73152" marT="18288" marB="18288" anchor="ctr">
+                    <a:solidFill>
+                      <a:srgbClr val="FFFFFF"/>
+                    </a:solidFill>
+                  </a:tcPr>
                 </a:tc>
                 <a:tc>
                   <a:txBody>
@@ -17775,7 +18487,11 @@
                       </a:r>
                     </a:p>
                   </a:txBody>
-                  <a:tcPr marL="54864" marR="54864" marT="18288" marB="18288" anchor="ctr"/>
+                  <a:tcPr marL="73152" marR="73152" marT="18288" marB="18288" anchor="ctr">
+                    <a:solidFill>
+                      <a:srgbClr val="FFFFFF"/>
+                    </a:solidFill>
+                  </a:tcPr>
                 </a:tc>
                 <a:tc>
                   <a:txBody>
@@ -17793,7 +18509,11 @@
                       </a:r>
                     </a:p>
                   </a:txBody>
-                  <a:tcPr marL="54864" marR="54864" marT="18288" marB="18288" anchor="ctr"/>
+                  <a:tcPr marL="73152" marR="73152" marT="18288" marB="18288" anchor="ctr">
+                    <a:solidFill>
+                      <a:srgbClr val="FFFFFF"/>
+                    </a:solidFill>
+                  </a:tcPr>
                 </a:tc>
               </a:tr>
               <a:tr h="274320">
@@ -17813,7 +18533,11 @@
                       </a:r>
                     </a:p>
                   </a:txBody>
-                  <a:tcPr marL="54864" marR="54864" marT="18288" marB="18288" anchor="ctr"/>
+                  <a:tcPr marL="73152" marR="73152" marT="18288" marB="18288" anchor="ctr">
+                    <a:solidFill>
+                      <a:srgbClr val="F2F2F2"/>
+                    </a:solidFill>
+                  </a:tcPr>
                 </a:tc>
                 <a:tc>
                   <a:txBody>
@@ -17831,7 +18555,11 @@
                       </a:r>
                     </a:p>
                   </a:txBody>
-                  <a:tcPr marL="54864" marR="54864" marT="18288" marB="18288" anchor="ctr"/>
+                  <a:tcPr marL="73152" marR="73152" marT="18288" marB="18288" anchor="ctr">
+                    <a:solidFill>
+                      <a:srgbClr val="F2F2F2"/>
+                    </a:solidFill>
+                  </a:tcPr>
                 </a:tc>
                 <a:tc>
                   <a:txBody>
@@ -17849,7 +18577,11 @@
                       </a:r>
                     </a:p>
                   </a:txBody>
-                  <a:tcPr marL="54864" marR="54864" marT="18288" marB="18288" anchor="ctr"/>
+                  <a:tcPr marL="73152" marR="73152" marT="18288" marB="18288" anchor="ctr">
+                    <a:solidFill>
+                      <a:srgbClr val="F2F2F2"/>
+                    </a:solidFill>
+                  </a:tcPr>
                 </a:tc>
                 <a:tc>
                   <a:txBody>
@@ -17867,7 +18599,11 @@
                       </a:r>
                     </a:p>
                   </a:txBody>
-                  <a:tcPr marL="54864" marR="54864" marT="18288" marB="18288" anchor="ctr"/>
+                  <a:tcPr marL="73152" marR="73152" marT="18288" marB="18288" anchor="ctr">
+                    <a:solidFill>
+                      <a:srgbClr val="F2F2F2"/>
+                    </a:solidFill>
+                  </a:tcPr>
                 </a:tc>
               </a:tr>
               <a:tr h="274320">
@@ -17887,7 +18623,11 @@
                       </a:r>
                     </a:p>
                   </a:txBody>
-                  <a:tcPr marL="54864" marR="54864" marT="18288" marB="18288" anchor="ctr"/>
+                  <a:tcPr marL="73152" marR="73152" marT="18288" marB="18288" anchor="ctr">
+                    <a:solidFill>
+                      <a:srgbClr val="FFFFFF"/>
+                    </a:solidFill>
+                  </a:tcPr>
                 </a:tc>
                 <a:tc>
                   <a:txBody>
@@ -17905,7 +18645,11 @@
                       </a:r>
                     </a:p>
                   </a:txBody>
-                  <a:tcPr marL="54864" marR="54864" marT="18288" marB="18288" anchor="ctr"/>
+                  <a:tcPr marL="73152" marR="73152" marT="18288" marB="18288" anchor="ctr">
+                    <a:solidFill>
+                      <a:srgbClr val="FFFFFF"/>
+                    </a:solidFill>
+                  </a:tcPr>
                 </a:tc>
                 <a:tc>
                   <a:txBody>
@@ -17923,7 +18667,11 @@
                       </a:r>
                     </a:p>
                   </a:txBody>
-                  <a:tcPr marL="54864" marR="54864" marT="18288" marB="18288" anchor="ctr"/>
+                  <a:tcPr marL="73152" marR="73152" marT="18288" marB="18288" anchor="ctr">
+                    <a:solidFill>
+                      <a:srgbClr val="FFFFFF"/>
+                    </a:solidFill>
+                  </a:tcPr>
                 </a:tc>
                 <a:tc>
                   <a:txBody>
@@ -17941,7 +18689,11 @@
                       </a:r>
                     </a:p>
                   </a:txBody>
-                  <a:tcPr marL="54864" marR="54864" marT="18288" marB="18288" anchor="ctr"/>
+                  <a:tcPr marL="73152" marR="73152" marT="18288" marB="18288" anchor="ctr">
+                    <a:solidFill>
+                      <a:srgbClr val="FFFFFF"/>
+                    </a:solidFill>
+                  </a:tcPr>
                 </a:tc>
               </a:tr>
               <a:tr h="274320">
@@ -17961,7 +18713,11 @@
                       </a:r>
                     </a:p>
                   </a:txBody>
-                  <a:tcPr marL="54864" marR="54864" marT="18288" marB="18288" anchor="ctr"/>
+                  <a:tcPr marL="73152" marR="73152" marT="18288" marB="18288" anchor="ctr">
+                    <a:solidFill>
+                      <a:srgbClr val="F2F2F2"/>
+                    </a:solidFill>
+                  </a:tcPr>
                 </a:tc>
                 <a:tc>
                   <a:txBody>
@@ -17979,7 +18735,11 @@
                       </a:r>
                     </a:p>
                   </a:txBody>
-                  <a:tcPr marL="54864" marR="54864" marT="18288" marB="18288" anchor="ctr"/>
+                  <a:tcPr marL="73152" marR="73152" marT="18288" marB="18288" anchor="ctr">
+                    <a:solidFill>
+                      <a:srgbClr val="F2F2F2"/>
+                    </a:solidFill>
+                  </a:tcPr>
                 </a:tc>
                 <a:tc>
                   <a:txBody>
@@ -17997,7 +18757,11 @@
                       </a:r>
                     </a:p>
                   </a:txBody>
-                  <a:tcPr marL="54864" marR="54864" marT="18288" marB="18288" anchor="ctr"/>
+                  <a:tcPr marL="73152" marR="73152" marT="18288" marB="18288" anchor="ctr">
+                    <a:solidFill>
+                      <a:srgbClr val="F2F2F2"/>
+                    </a:solidFill>
+                  </a:tcPr>
                 </a:tc>
                 <a:tc>
                   <a:txBody>
@@ -18015,7 +18779,11 @@
                       </a:r>
                     </a:p>
                   </a:txBody>
-                  <a:tcPr marL="54864" marR="54864" marT="18288" marB="18288" anchor="ctr"/>
+                  <a:tcPr marL="73152" marR="73152" marT="18288" marB="18288" anchor="ctr">
+                    <a:solidFill>
+                      <a:srgbClr val="F2F2F2"/>
+                    </a:solidFill>
+                  </a:tcPr>
                 </a:tc>
               </a:tr>
               <a:tr h="274320">
@@ -18035,7 +18803,11 @@
                       </a:r>
                     </a:p>
                   </a:txBody>
-                  <a:tcPr marL="54864" marR="54864" marT="18288" marB="18288" anchor="ctr"/>
+                  <a:tcPr marL="73152" marR="73152" marT="18288" marB="18288" anchor="ctr">
+                    <a:solidFill>
+                      <a:srgbClr val="FFFFFF"/>
+                    </a:solidFill>
+                  </a:tcPr>
                 </a:tc>
                 <a:tc>
                   <a:txBody>
@@ -18053,7 +18825,11 @@
                       </a:r>
                     </a:p>
                   </a:txBody>
-                  <a:tcPr marL="54864" marR="54864" marT="18288" marB="18288" anchor="ctr"/>
+                  <a:tcPr marL="73152" marR="73152" marT="18288" marB="18288" anchor="ctr">
+                    <a:solidFill>
+                      <a:srgbClr val="FFFFFF"/>
+                    </a:solidFill>
+                  </a:tcPr>
                 </a:tc>
                 <a:tc>
                   <a:txBody>
@@ -18071,7 +18847,11 @@
                       </a:r>
                     </a:p>
                   </a:txBody>
-                  <a:tcPr marL="54864" marR="54864" marT="18288" marB="18288" anchor="ctr"/>
+                  <a:tcPr marL="73152" marR="73152" marT="18288" marB="18288" anchor="ctr">
+                    <a:solidFill>
+                      <a:srgbClr val="FFFFFF"/>
+                    </a:solidFill>
+                  </a:tcPr>
                 </a:tc>
                 <a:tc>
                   <a:txBody>
@@ -18089,7 +18869,11 @@
                       </a:r>
                     </a:p>
                   </a:txBody>
-                  <a:tcPr marL="54864" marR="54864" marT="18288" marB="18288" anchor="ctr"/>
+                  <a:tcPr marL="73152" marR="73152" marT="18288" marB="18288" anchor="ctr">
+                    <a:solidFill>
+                      <a:srgbClr val="FFFFFF"/>
+                    </a:solidFill>
+                  </a:tcPr>
                 </a:tc>
               </a:tr>
               <a:tr h="274320">
@@ -18101,7 +18885,7 @@
                       <a:r>
                         <a:rPr sz="1200" b="1">
                           <a:solidFill>
-                            <a:srgbClr val="262626"/>
+                            <a:srgbClr val="C0392B"/>
                           </a:solidFill>
                           <a:latin typeface="Calibri"/>
                         </a:rPr>
@@ -18109,7 +18893,11 @@
                       </a:r>
                     </a:p>
                   </a:txBody>
-                  <a:tcPr marL="54864" marR="54864" marT="18288" marB="18288" anchor="ctr"/>
+                  <a:tcPr marL="73152" marR="73152" marT="18288" marB="18288" anchor="ctr">
+                    <a:solidFill>
+                      <a:srgbClr val="FAEEEC"/>
+                    </a:solidFill>
+                  </a:tcPr>
                 </a:tc>
                 <a:tc>
                   <a:txBody>
@@ -18127,7 +18915,11 @@
                       </a:r>
                     </a:p>
                   </a:txBody>
-                  <a:tcPr marL="54864" marR="54864" marT="18288" marB="18288" anchor="ctr"/>
+                  <a:tcPr marL="73152" marR="73152" marT="18288" marB="18288" anchor="ctr">
+                    <a:solidFill>
+                      <a:srgbClr val="FAEEEC"/>
+                    </a:solidFill>
+                  </a:tcPr>
                 </a:tc>
                 <a:tc>
                   <a:txBody>
@@ -18145,7 +18937,11 @@
                       </a:r>
                     </a:p>
                   </a:txBody>
-                  <a:tcPr marL="54864" marR="54864" marT="18288" marB="18288" anchor="ctr"/>
+                  <a:tcPr marL="73152" marR="73152" marT="18288" marB="18288" anchor="ctr">
+                    <a:solidFill>
+                      <a:srgbClr val="FAEEEC"/>
+                    </a:solidFill>
+                  </a:tcPr>
                 </a:tc>
                 <a:tc>
                   <a:txBody>
@@ -18153,9 +18949,9 @@
                     <a:lstStyle/>
                     <a:p>
                       <a:r>
-                        <a:rPr sz="1200" b="0">
+                        <a:rPr sz="1200" b="1">
                           <a:solidFill>
-                            <a:srgbClr val="262626"/>
+                            <a:srgbClr val="C0392B"/>
                           </a:solidFill>
                           <a:latin typeface="Calibri"/>
                         </a:rPr>
@@ -18163,7 +18959,11 @@
                       </a:r>
                     </a:p>
                   </a:txBody>
-                  <a:tcPr marL="54864" marR="54864" marT="18288" marB="18288" anchor="ctr"/>
+                  <a:tcPr marL="73152" marR="73152" marT="18288" marB="18288" anchor="ctr">
+                    <a:solidFill>
+                      <a:srgbClr val="FAEEEC"/>
+                    </a:solidFill>
+                  </a:tcPr>
                 </a:tc>
               </a:tr>
             </a:tbl>
@@ -18172,13 +18972,13 @@
       </p:graphicFrame>
       <p:sp>
         <p:nvSpPr>
-          <p:cNvPr id="13" name="TextBox 12"/>
+          <p:cNvPr id="23" name="TextBox 22"/>
           <p:cNvSpPr txBox="1"/>
           <p:nvPr/>
         </p:nvSpPr>
         <p:spPr>
           <a:xfrm>
-            <a:off x="3840480" y="5870448"/>
+            <a:off x="3840480" y="5943600"/>
             <a:ext cx="4663440" cy="502920"/>
           </a:xfrm>
           <a:prstGeom prst="rect">
@@ -18835,7 +19635,7 @@
         <p:spPr>
           <a:xfrm>
             <a:off x="3840480" y="548640"/>
-            <a:ext cx="4663440" cy="5394960"/>
+            <a:ext cx="4663440" cy="320040"/>
           </a:xfrm>
           <a:prstGeom prst="rect">
             <a:avLst/>
@@ -18850,20 +19650,59 @@
           <a:p>
             <a:pPr>
               <a:spcAft>
-                <a:spcPts val="700"/>
+                <a:spcPts val="500"/>
               </a:spcAft>
             </a:pPr>
             <a:r>
-              <a:rPr sz="1300" b="1" i="0">
+              <a:rPr sz="1350" b="1" i="0">
                 <a:solidFill>
-                  <a:srgbClr val="262626"/>
+                  <a:srgbClr val="C0392B"/>
+                </a:solidFill>
+                <a:latin typeface="Calibri"/>
+              </a:rPr>
+              <a:t>Team &amp; what we need</a:t>
+            </a:r>
+          </a:p>
+        </p:txBody>
+      </p:sp>
+      <p:sp>
+        <p:nvSpPr>
+          <p:cNvPr id="12" name="TextBox 11"/>
+          <p:cNvSpPr txBox="1"/>
+          <p:nvPr/>
+        </p:nvSpPr>
+        <p:spPr>
+          <a:xfrm>
+            <a:off x="3840480" y="960120"/>
+            <a:ext cx="2194560" cy="3200400"/>
+          </a:xfrm>
+          <a:prstGeom prst="rect">
+            <a:avLst/>
+          </a:prstGeom>
+          <a:noFill/>
+        </p:spPr>
+        <p:txBody>
+          <a:bodyPr wrap="square">
+            <a:spAutoFit/>
+          </a:bodyPr>
+          <a:lstStyle/>
+          <a:p>
+            <a:pPr>
+              <a:spcAft>
+                <a:spcPts val="900"/>
+              </a:spcAft>
+            </a:pPr>
+            <a:r>
+              <a:rPr sz="1250" b="1" i="0">
+                <a:solidFill>
+                  <a:srgbClr val="C0392B"/>
                 </a:solidFill>
                 <a:latin typeface="Calibri"/>
               </a:rPr>
               <a:t>Team: </a:t>
             </a:r>
             <a:r>
-              <a:rPr sz="1300" b="0" i="0">
+              <a:rPr sz="1250" b="0" i="0">
                 <a:solidFill>
                   <a:srgbClr val="262626"/>
                 </a:solidFill>
@@ -18875,20 +19714,20 @@
           <a:p>
             <a:pPr>
               <a:spcAft>
-                <a:spcPts val="700"/>
+                <a:spcPts val="0"/>
               </a:spcAft>
             </a:pPr>
             <a:r>
-              <a:rPr sz="1300" b="1" i="0">
+              <a:rPr sz="1250" b="1" i="0">
                 <a:solidFill>
-                  <a:srgbClr val="262626"/>
+                  <a:srgbClr val="C0392B"/>
                 </a:solidFill>
                 <a:latin typeface="Calibri"/>
               </a:rPr>
               <a:t>Gaps we are filling: </a:t>
             </a:r>
             <a:r>
-              <a:rPr sz="1300" b="0" i="0">
+              <a:rPr sz="1250" b="0" i="0">
                 <a:solidFill>
                   <a:srgbClr val="262626"/>
                 </a:solidFill>
@@ -18897,23 +19736,89 @@
               <a:t>marketing, trust and safety (moderation), legal and data protection, and a professional designer.</a:t>
             </a:r>
           </a:p>
+        </p:txBody>
+      </p:sp>
+      <p:sp>
+        <p:nvSpPr>
+          <p:cNvPr id="13" name="Rectangle 12"/>
+          <p:cNvSpPr/>
+          <p:nvPr/>
+        </p:nvSpPr>
+        <p:spPr>
+          <a:xfrm>
+            <a:off x="6126480" y="1051560"/>
+            <a:ext cx="10972" cy="2834640"/>
+          </a:xfrm>
+          <a:prstGeom prst="rect">
+            <a:avLst/>
+          </a:prstGeom>
+          <a:solidFill>
+            <a:srgbClr val="F2F2F2"/>
+          </a:solidFill>
+          <a:ln>
+            <a:noFill/>
+          </a:ln>
+        </p:spPr>
+        <p:style>
+          <a:lnRef idx="1">
+            <a:schemeClr val="accent1"/>
+          </a:lnRef>
+          <a:fillRef idx="3">
+            <a:schemeClr val="accent1"/>
+          </a:fillRef>
+          <a:effectRef idx="2">
+            <a:schemeClr val="accent1"/>
+          </a:effectRef>
+          <a:fontRef idx="minor">
+            <a:schemeClr val="lt1"/>
+          </a:fontRef>
+        </p:style>
+        <p:txBody>
+          <a:bodyPr rtlCol="0" anchor="ctr"/>
+          <a:lstStyle/>
+          <a:p>
+            <a:pPr algn="ctr"/>
+          </a:p>
+        </p:txBody>
+      </p:sp>
+      <p:sp>
+        <p:nvSpPr>
+          <p:cNvPr id="14" name="TextBox 13"/>
+          <p:cNvSpPr txBox="1"/>
+          <p:nvPr/>
+        </p:nvSpPr>
+        <p:spPr>
+          <a:xfrm>
+            <a:off x="6309360" y="960120"/>
+            <a:ext cx="2194560" cy="3200400"/>
+          </a:xfrm>
+          <a:prstGeom prst="rect">
+            <a:avLst/>
+          </a:prstGeom>
+          <a:noFill/>
+        </p:spPr>
+        <p:txBody>
+          <a:bodyPr wrap="square">
+            <a:spAutoFit/>
+          </a:bodyPr>
+          <a:lstStyle/>
           <a:p>
             <a:pPr>
               <a:spcAft>
-                <a:spcPts val="700"/>
+                <a:spcPts val="900"/>
               </a:spcAft>
             </a:pPr>
             <a:r>
-              <a:rPr sz="1300" b="1" i="0">
+              <a:rPr sz="1250" b="1" i="0">
                 <a:solidFill>
-                  <a:srgbClr val="262626"/>
+                  <a:srgbClr val="C0392B"/>
                 </a:solidFill>
                 <a:latin typeface="Calibri"/>
               </a:rPr>
               <a:t>Use of funds: </a:t>
             </a:r>
             <a:r>
-              <a:rPr sz="1300" b="0" i="0">
+              <a:rPr sz="1250" b="0" i="0">
                 <a:solidFill>
                   <a:srgbClr val="262626"/>
                 </a:solidFill>
@@ -18925,20 +19830,20 @@
           <a:p>
             <a:pPr>
               <a:spcAft>
-                <a:spcPts val="700"/>
+                <a:spcPts val="0"/>
               </a:spcAft>
             </a:pPr>
             <a:r>
-              <a:rPr sz="1300" b="1" i="0">
+              <a:rPr sz="1250" b="1" i="0">
                 <a:solidFill>
-                  <a:srgbClr val="262626"/>
+                  <a:srgbClr val="C0392B"/>
                 </a:solidFill>
                 <a:latin typeface="Calibri"/>
               </a:rPr>
               <a:t>Support needed: </a:t>
             </a:r>
             <a:r>
-              <a:rPr sz="1300" b="0" i="0">
+              <a:rPr sz="1250" b="0" i="0">
                 <a:solidFill>
                   <a:srgbClr val="262626"/>
                 </a:solidFill>
@@ -18947,16 +19852,40 @@
               <a:t>mentorship in trust and safety, legal and data protection, design and marketing; introductions to student communities at other campuses.</a:t>
             </a:r>
           </a:p>
+        </p:txBody>
+      </p:sp>
+      <p:sp>
+        <p:nvSpPr>
+          <p:cNvPr id="15" name="TextBox 14"/>
+          <p:cNvSpPr txBox="1"/>
+          <p:nvPr/>
+        </p:nvSpPr>
+        <p:spPr>
+          <a:xfrm>
+            <a:off x="3840480" y="4251960"/>
+            <a:ext cx="4663440" cy="457200"/>
+          </a:xfrm>
+          <a:prstGeom prst="rect">
+            <a:avLst/>
+          </a:prstGeom>
+          <a:noFill/>
+        </p:spPr>
+        <p:txBody>
+          <a:bodyPr wrap="square">
+            <a:spAutoFit/>
+          </a:bodyPr>
+          <a:lstStyle/>
           <a:p>
-            <a:pPr>
+            <a:pPr marL="164592" indent="-164592">
               <a:spcAft>
-                <a:spcPts val="700"/>
+                <a:spcPts val="0"/>
               </a:spcAft>
+              <a:buNone/>
             </a:pPr>
             <a:r>
               <a:rPr sz="1300" b="1" i="0">
                 <a:solidFill>
-                  <a:srgbClr val="262626"/>
+                  <a:srgbClr val="C0392B"/>
                 </a:solidFill>
                 <a:latin typeface="Calibri"/>
               </a:rPr>
@@ -18972,6 +19901,53 @@
               <a:t>the fully featured verified network, live across colleges from Nov 2026.</a:t>
             </a:r>
           </a:p>
+        </p:txBody>
+      </p:sp>
+      <p:sp>
+        <p:nvSpPr>
+          <p:cNvPr id="16" name="Rounded Rectangle 15"/>
+          <p:cNvSpPr/>
+          <p:nvPr/>
+        </p:nvSpPr>
+        <p:spPr>
+          <a:xfrm>
+            <a:off x="3840480" y="4846320"/>
+            <a:ext cx="4663440" cy="1325880"/>
+          </a:xfrm>
+          <a:prstGeom prst="roundRect">
+            <a:avLst>
+              <a:gd name="adj" fmla="val 10000"/>
+            </a:avLst>
+          </a:prstGeom>
+          <a:solidFill>
+            <a:srgbClr val="FAEEEC"/>
+          </a:solidFill>
+          <a:ln w="12700">
+            <a:solidFill>
+              <a:srgbClr val="FAEEEC"/>
+            </a:solidFill>
+          </a:ln>
+        </p:spPr>
+        <p:style>
+          <a:lnRef idx="1">
+            <a:schemeClr val="accent1"/>
+          </a:lnRef>
+          <a:fillRef idx="3">
+            <a:schemeClr val="accent1"/>
+          </a:fillRef>
+          <a:effectRef idx="2">
+            <a:schemeClr val="accent1"/>
+          </a:effectRef>
+          <a:fontRef idx="minor">
+            <a:schemeClr val="lt1"/>
+          </a:fontRef>
+        </p:style>
+        <p:txBody>
+          <a:bodyPr rtlCol="0" anchor="ctr" wrap="square" lIns="109728" rIns="109728" tIns="73152" bIns="73152"/>
+          <a:lstStyle/>
+          <a:p>
+            <a:pPr algn="ctr"/>
+          </a:p>
           <a:p>
             <a:pPr>
               <a:spcAft>
@@ -18981,7 +19957,7 @@
             <a:r>
               <a:rPr sz="1300" b="1" i="0">
                 <a:solidFill>
-                  <a:srgbClr val="262626"/>
+                  <a:srgbClr val="C0392B"/>
                 </a:solidFill>
                 <a:latin typeface="Calibri"/>
               </a:rPr>
@@ -18994,7 +19970,25 @@
                 </a:solidFill>
                 <a:latin typeface="Calibri"/>
               </a:rPr>
-              <a:t>a verified social space for India’s 4.5 crore students. Long term: the trusted place where every college student in India meets people — for dating and friendship — then the same verified model abroad.</a:t>
+              <a:t>a verified social space for India’s </a:t>
+            </a:r>
+            <a:r>
+              <a:rPr sz="1300" b="1" i="0">
+                <a:solidFill>
+                  <a:srgbClr val="C0392B"/>
+                </a:solidFill>
+                <a:latin typeface="Calibri"/>
+              </a:rPr>
+              <a:t>4.5 crore </a:t>
+            </a:r>
+            <a:r>
+              <a:rPr sz="1300" b="0" i="0">
+                <a:solidFill>
+                  <a:srgbClr val="262626"/>
+                </a:solidFill>
+                <a:latin typeface="Calibri"/>
+              </a:rPr>
+              <a:t>students. Long term: the trusted place where every college student in India meets people — for dating and friendship — then the same verified model abroad.</a:t>
             </a:r>
           </a:p>
         </p:txBody>
@@ -19226,7 +20220,7 @@
           <p:nvPr/>
         </p:nvGraphicFramePr>
         <p:xfrm>
-          <a:off x="548640" y="1920240"/>
+          <a:off x="548640" y="1828800"/>
           <a:ext cx="8046720" cy="2194560"/>
         </p:xfrm>
         <a:graphic>
@@ -19257,9 +20251,9 @@
                       </a:r>
                     </a:p>
                   </a:txBody>
-                  <a:tcPr marL="54864" marR="54864" marT="18288" marB="18288" anchor="ctr">
+                  <a:tcPr marL="73152" marR="73152" marT="64008" marB="64008" anchor="ctr">
                     <a:solidFill>
-                      <a:srgbClr val="404040"/>
+                      <a:srgbClr val="C0392B"/>
                     </a:solidFill>
                   </a:tcPr>
                 </a:tc>
@@ -19279,9 +20273,9 @@
                       </a:r>
                     </a:p>
                   </a:txBody>
-                  <a:tcPr marL="54864" marR="54864" marT="18288" marB="18288" anchor="ctr">
+                  <a:tcPr marL="73152" marR="73152" marT="64008" marB="64008" anchor="ctr">
                     <a:solidFill>
-                      <a:srgbClr val="404040"/>
+                      <a:srgbClr val="C0392B"/>
                     </a:solidFill>
                   </a:tcPr>
                 </a:tc>
@@ -19301,9 +20295,9 @@
                       </a:r>
                     </a:p>
                   </a:txBody>
-                  <a:tcPr marL="54864" marR="54864" marT="18288" marB="18288" anchor="ctr">
+                  <a:tcPr marL="73152" marR="73152" marT="64008" marB="64008" anchor="ctr">
                     <a:solidFill>
-                      <a:srgbClr val="404040"/>
+                      <a:srgbClr val="C0392B"/>
                     </a:solidFill>
                   </a:tcPr>
                 </a:tc>
@@ -19315,7 +20309,7 @@
                     <a:lstStyle/>
                     <a:p>
                       <a:r>
-                        <a:rPr sz="1200" b="1">
+                        <a:rPr sz="1300" b="1">
                           <a:solidFill>
                             <a:srgbClr val="262626"/>
                           </a:solidFill>
@@ -19325,7 +20319,11 @@
                       </a:r>
                     </a:p>
                   </a:txBody>
-                  <a:tcPr marL="54864" marR="54864" marT="18288" marB="18288" anchor="ctr"/>
+                  <a:tcPr marL="73152" marR="73152" marT="64008" marB="64008" anchor="ctr">
+                    <a:solidFill>
+                      <a:srgbClr val="FFFFFF"/>
+                    </a:solidFill>
+                  </a:tcPr>
                 </a:tc>
                 <a:tc>
                   <a:txBody>
@@ -19333,7 +20331,7 @@
                     <a:lstStyle/>
                     <a:p>
                       <a:r>
-                        <a:rPr sz="1200" b="0">
+                        <a:rPr sz="1300" b="0">
                           <a:solidFill>
                             <a:srgbClr val="262626"/>
                           </a:solidFill>
@@ -19343,7 +20341,11 @@
                       </a:r>
                     </a:p>
                   </a:txBody>
-                  <a:tcPr marL="54864" marR="54864" marT="18288" marB="18288" anchor="ctr"/>
+                  <a:tcPr marL="73152" marR="73152" marT="64008" marB="64008" anchor="ctr">
+                    <a:solidFill>
+                      <a:srgbClr val="FFFFFF"/>
+                    </a:solidFill>
+                  </a:tcPr>
                 </a:tc>
                 <a:tc>
                   <a:txBody>
@@ -19351,7 +20353,7 @@
                     <a:lstStyle/>
                     <a:p>
                       <a:r>
-                        <a:rPr sz="1200" b="0">
+                        <a:rPr sz="1300" b="0">
                           <a:solidFill>
                             <a:srgbClr val="262626"/>
                           </a:solidFill>
@@ -19361,7 +20363,11 @@
                       </a:r>
                     </a:p>
                   </a:txBody>
-                  <a:tcPr marL="54864" marR="54864" marT="18288" marB="18288" anchor="ctr"/>
+                  <a:tcPr marL="73152" marR="73152" marT="64008" marB="64008" anchor="ctr">
+                    <a:solidFill>
+                      <a:srgbClr val="FFFFFF"/>
+                    </a:solidFill>
+                  </a:tcPr>
                 </a:tc>
               </a:tr>
               <a:tr h="274320">
@@ -19371,7 +20377,7 @@
                     <a:lstStyle/>
                     <a:p>
                       <a:r>
-                        <a:rPr sz="1200" b="1">
+                        <a:rPr sz="1300" b="1">
                           <a:solidFill>
                             <a:srgbClr val="262626"/>
                           </a:solidFill>
@@ -19381,7 +20387,11 @@
                       </a:r>
                     </a:p>
                   </a:txBody>
-                  <a:tcPr marL="54864" marR="54864" marT="18288" marB="18288" anchor="ctr"/>
+                  <a:tcPr marL="73152" marR="73152" marT="64008" marB="64008" anchor="ctr">
+                    <a:solidFill>
+                      <a:srgbClr val="F2F2F2"/>
+                    </a:solidFill>
+                  </a:tcPr>
                 </a:tc>
                 <a:tc>
                   <a:txBody>
@@ -19389,7 +20399,7 @@
                     <a:lstStyle/>
                     <a:p>
                       <a:r>
-                        <a:rPr sz="1200" b="0">
+                        <a:rPr sz="1300" b="0">
                           <a:solidFill>
                             <a:srgbClr val="262626"/>
                           </a:solidFill>
@@ -19399,7 +20409,11 @@
                       </a:r>
                     </a:p>
                   </a:txBody>
-                  <a:tcPr marL="54864" marR="54864" marT="18288" marB="18288" anchor="ctr"/>
+                  <a:tcPr marL="73152" marR="73152" marT="64008" marB="64008" anchor="ctr">
+                    <a:solidFill>
+                      <a:srgbClr val="F2F2F2"/>
+                    </a:solidFill>
+                  </a:tcPr>
                 </a:tc>
                 <a:tc>
                   <a:txBody>
@@ -19407,7 +20421,7 @@
                     <a:lstStyle/>
                     <a:p>
                       <a:r>
-                        <a:rPr sz="1200" b="0">
+                        <a:rPr sz="1300" b="0">
                           <a:solidFill>
                             <a:srgbClr val="262626"/>
                           </a:solidFill>
@@ -19417,7 +20431,11 @@
                       </a:r>
                     </a:p>
                   </a:txBody>
-                  <a:tcPr marL="54864" marR="54864" marT="18288" marB="18288" anchor="ctr"/>
+                  <a:tcPr marL="73152" marR="73152" marT="64008" marB="64008" anchor="ctr">
+                    <a:solidFill>
+                      <a:srgbClr val="F2F2F2"/>
+                    </a:solidFill>
+                  </a:tcPr>
                 </a:tc>
               </a:tr>
               <a:tr h="274320">
@@ -19427,7 +20445,7 @@
                     <a:lstStyle/>
                     <a:p>
                       <a:r>
-                        <a:rPr sz="1200" b="1">
+                        <a:rPr sz="1300" b="1">
                           <a:solidFill>
                             <a:srgbClr val="262626"/>
                           </a:solidFill>
@@ -19437,7 +20455,11 @@
                       </a:r>
                     </a:p>
                   </a:txBody>
-                  <a:tcPr marL="54864" marR="54864" marT="18288" marB="18288" anchor="ctr"/>
+                  <a:tcPr marL="73152" marR="73152" marT="64008" marB="64008" anchor="ctr">
+                    <a:solidFill>
+                      <a:srgbClr val="FFFFFF"/>
+                    </a:solidFill>
+                  </a:tcPr>
                 </a:tc>
                 <a:tc>
                   <a:txBody>
@@ -19445,7 +20467,7 @@
                     <a:lstStyle/>
                     <a:p>
                       <a:r>
-                        <a:rPr sz="1200" b="0">
+                        <a:rPr sz="1300" b="0">
                           <a:solidFill>
                             <a:srgbClr val="262626"/>
                           </a:solidFill>
@@ -19455,7 +20477,11 @@
                       </a:r>
                     </a:p>
                   </a:txBody>
-                  <a:tcPr marL="54864" marR="54864" marT="18288" marB="18288" anchor="ctr"/>
+                  <a:tcPr marL="73152" marR="73152" marT="64008" marB="64008" anchor="ctr">
+                    <a:solidFill>
+                      <a:srgbClr val="FFFFFF"/>
+                    </a:solidFill>
+                  </a:tcPr>
                 </a:tc>
                 <a:tc>
                   <a:txBody>
@@ -19463,7 +20489,7 @@
                     <a:lstStyle/>
                     <a:p>
                       <a:r>
-                        <a:rPr sz="1200" b="0">
+                        <a:rPr sz="1300" b="0">
                           <a:solidFill>
                             <a:srgbClr val="262626"/>
                           </a:solidFill>
@@ -19473,7 +20499,11 @@
                       </a:r>
                     </a:p>
                   </a:txBody>
-                  <a:tcPr marL="54864" marR="54864" marT="18288" marB="18288" anchor="ctr"/>
+                  <a:tcPr marL="73152" marR="73152" marT="64008" marB="64008" anchor="ctr">
+                    <a:solidFill>
+                      <a:srgbClr val="FFFFFF"/>
+                    </a:solidFill>
+                  </a:tcPr>
                 </a:tc>
               </a:tr>
               <a:tr h="274320">
@@ -19483,7 +20513,7 @@
                     <a:lstStyle/>
                     <a:p>
                       <a:r>
-                        <a:rPr sz="1200" b="1">
+                        <a:rPr sz="1300" b="1">
                           <a:solidFill>
                             <a:srgbClr val="262626"/>
                           </a:solidFill>
@@ -19493,7 +20523,11 @@
                       </a:r>
                     </a:p>
                   </a:txBody>
-                  <a:tcPr marL="54864" marR="54864" marT="18288" marB="18288" anchor="ctr"/>
+                  <a:tcPr marL="73152" marR="73152" marT="64008" marB="64008" anchor="ctr">
+                    <a:solidFill>
+                      <a:srgbClr val="F2F2F2"/>
+                    </a:solidFill>
+                  </a:tcPr>
                 </a:tc>
                 <a:tc>
                   <a:txBody>
@@ -19501,7 +20535,7 @@
                     <a:lstStyle/>
                     <a:p>
                       <a:r>
-                        <a:rPr sz="1200" b="0">
+                        <a:rPr sz="1300" b="0">
                           <a:solidFill>
                             <a:srgbClr val="262626"/>
                           </a:solidFill>
@@ -19511,7 +20545,11 @@
                       </a:r>
                     </a:p>
                   </a:txBody>
-                  <a:tcPr marL="54864" marR="54864" marT="18288" marB="18288" anchor="ctr"/>
+                  <a:tcPr marL="73152" marR="73152" marT="64008" marB="64008" anchor="ctr">
+                    <a:solidFill>
+                      <a:srgbClr val="F2F2F2"/>
+                    </a:solidFill>
+                  </a:tcPr>
                 </a:tc>
                 <a:tc>
                   <a:txBody>
@@ -19519,7 +20557,7 @@
                     <a:lstStyle/>
                     <a:p>
                       <a:r>
-                        <a:rPr sz="1200" b="0">
+                        <a:rPr sz="1300" b="0">
                           <a:solidFill>
                             <a:srgbClr val="262626"/>
                           </a:solidFill>
@@ -19529,7 +20567,11 @@
                       </a:r>
                     </a:p>
                   </a:txBody>
-                  <a:tcPr marL="54864" marR="54864" marT="18288" marB="18288" anchor="ctr"/>
+                  <a:tcPr marL="73152" marR="73152" marT="64008" marB="64008" anchor="ctr">
+                    <a:solidFill>
+                      <a:srgbClr val="F2F2F2"/>
+                    </a:solidFill>
+                  </a:tcPr>
                 </a:tc>
               </a:tr>
               <a:tr h="274320">
@@ -19539,7 +20581,7 @@
                     <a:lstStyle/>
                     <a:p>
                       <a:r>
-                        <a:rPr sz="1200" b="1">
+                        <a:rPr sz="1300" b="1">
                           <a:solidFill>
                             <a:srgbClr val="262626"/>
                           </a:solidFill>
@@ -19549,7 +20591,11 @@
                       </a:r>
                     </a:p>
                   </a:txBody>
-                  <a:tcPr marL="54864" marR="54864" marT="18288" marB="18288" anchor="ctr"/>
+                  <a:tcPr marL="73152" marR="73152" marT="64008" marB="64008" anchor="ctr">
+                    <a:solidFill>
+                      <a:srgbClr val="FFFFFF"/>
+                    </a:solidFill>
+                  </a:tcPr>
                 </a:tc>
                 <a:tc>
                   <a:txBody>
@@ -19557,7 +20603,7 @@
                     <a:lstStyle/>
                     <a:p>
                       <a:r>
-                        <a:rPr sz="1200" b="0">
+                        <a:rPr sz="1300" b="0">
                           <a:solidFill>
                             <a:srgbClr val="262626"/>
                           </a:solidFill>
@@ -19567,7 +20613,11 @@
                       </a:r>
                     </a:p>
                   </a:txBody>
-                  <a:tcPr marL="54864" marR="54864" marT="18288" marB="18288" anchor="ctr"/>
+                  <a:tcPr marL="73152" marR="73152" marT="64008" marB="64008" anchor="ctr">
+                    <a:solidFill>
+                      <a:srgbClr val="FFFFFF"/>
+                    </a:solidFill>
+                  </a:tcPr>
                 </a:tc>
                 <a:tc>
                   <a:txBody>
@@ -19575,7 +20625,7 @@
                     <a:lstStyle/>
                     <a:p>
                       <a:r>
-                        <a:rPr sz="1200" b="0">
+                        <a:rPr sz="1300" b="0">
                           <a:solidFill>
                             <a:srgbClr val="262626"/>
                           </a:solidFill>
@@ -19585,7 +20635,11 @@
                       </a:r>
                     </a:p>
                   </a:txBody>
-                  <a:tcPr marL="54864" marR="54864" marT="18288" marB="18288" anchor="ctr"/>
+                  <a:tcPr marL="73152" marR="73152" marT="64008" marB="64008" anchor="ctr">
+                    <a:solidFill>
+                      <a:srgbClr val="FFFFFF"/>
+                    </a:solidFill>
+                  </a:tcPr>
                 </a:tc>
               </a:tr>
               <a:tr h="274320">
@@ -19595,7 +20649,7 @@
                     <a:lstStyle/>
                     <a:p>
                       <a:r>
-                        <a:rPr sz="1200" b="1">
+                        <a:rPr sz="1300" b="1">
                           <a:solidFill>
                             <a:srgbClr val="262626"/>
                           </a:solidFill>
@@ -19605,7 +20659,11 @@
                       </a:r>
                     </a:p>
                   </a:txBody>
-                  <a:tcPr marL="54864" marR="54864" marT="18288" marB="18288" anchor="ctr"/>
+                  <a:tcPr marL="73152" marR="73152" marT="64008" marB="64008" anchor="ctr">
+                    <a:solidFill>
+                      <a:srgbClr val="F2F2F2"/>
+                    </a:solidFill>
+                  </a:tcPr>
                 </a:tc>
                 <a:tc>
                   <a:txBody>
@@ -19613,7 +20671,7 @@
                     <a:lstStyle/>
                     <a:p>
                       <a:r>
-                        <a:rPr sz="1200" b="0">
+                        <a:rPr sz="1300" b="0">
                           <a:solidFill>
                             <a:srgbClr val="262626"/>
                           </a:solidFill>
@@ -19623,7 +20681,11 @@
                       </a:r>
                     </a:p>
                   </a:txBody>
-                  <a:tcPr marL="54864" marR="54864" marT="18288" marB="18288" anchor="ctr"/>
+                  <a:tcPr marL="73152" marR="73152" marT="64008" marB="64008" anchor="ctr">
+                    <a:solidFill>
+                      <a:srgbClr val="F2F2F2"/>
+                    </a:solidFill>
+                  </a:tcPr>
                 </a:tc>
                 <a:tc>
                   <a:txBody>
@@ -19631,7 +20693,7 @@
                     <a:lstStyle/>
                     <a:p>
                       <a:r>
-                        <a:rPr sz="1200" b="0">
+                        <a:rPr sz="1300" b="0">
                           <a:solidFill>
                             <a:srgbClr val="262626"/>
                           </a:solidFill>
@@ -19641,7 +20703,11 @@
                       </a:r>
                     </a:p>
                   </a:txBody>
-                  <a:tcPr marL="54864" marR="54864" marT="18288" marB="18288" anchor="ctr"/>
+                  <a:tcPr marL="73152" marR="73152" marT="64008" marB="64008" anchor="ctr">
+                    <a:solidFill>
+                      <a:srgbClr val="F2F2F2"/>
+                    </a:solidFill>
+                  </a:tcPr>
                 </a:tc>
               </a:tr>
               <a:tr h="274320">
@@ -19651,7 +20717,7 @@
                     <a:lstStyle/>
                     <a:p>
                       <a:r>
-                        <a:rPr sz="1200" b="1">
+                        <a:rPr sz="1300" b="1">
                           <a:solidFill>
                             <a:srgbClr val="262626"/>
                           </a:solidFill>
@@ -19661,7 +20727,11 @@
                       </a:r>
                     </a:p>
                   </a:txBody>
-                  <a:tcPr marL="54864" marR="54864" marT="18288" marB="18288" anchor="ctr"/>
+                  <a:tcPr marL="73152" marR="73152" marT="64008" marB="64008" anchor="ctr">
+                    <a:solidFill>
+                      <a:srgbClr val="FAEEEC"/>
+                    </a:solidFill>
+                  </a:tcPr>
                 </a:tc>
                 <a:tc>
                   <a:txBody>
@@ -19669,7 +20739,7 @@
                     <a:lstStyle/>
                     <a:p>
                       <a:r>
-                        <a:rPr sz="1200" b="0">
+                        <a:rPr sz="1300" b="0">
                           <a:solidFill>
                             <a:srgbClr val="262626"/>
                           </a:solidFill>
@@ -19679,7 +20749,11 @@
                       </a:r>
                     </a:p>
                   </a:txBody>
-                  <a:tcPr marL="54864" marR="54864" marT="18288" marB="18288" anchor="ctr"/>
+                  <a:tcPr marL="73152" marR="73152" marT="64008" marB="64008" anchor="ctr">
+                    <a:solidFill>
+                      <a:srgbClr val="FAEEEC"/>
+                    </a:solidFill>
+                  </a:tcPr>
                 </a:tc>
                 <a:tc>
                   <a:txBody>
@@ -19687,7 +20761,7 @@
                     <a:lstStyle/>
                     <a:p>
                       <a:r>
-                        <a:rPr sz="1200" b="1">
+                        <a:rPr sz="1300" b="1">
                           <a:solidFill>
                             <a:srgbClr val="262626"/>
                           </a:solidFill>
@@ -19697,7 +20771,11 @@
                       </a:r>
                     </a:p>
                   </a:txBody>
-                  <a:tcPr marL="54864" marR="54864" marT="18288" marB="18288" anchor="ctr"/>
+                  <a:tcPr marL="73152" marR="73152" marT="64008" marB="64008" anchor="ctr">
+                    <a:solidFill>
+                      <a:srgbClr val="FAEEEC"/>
+                    </a:solidFill>
+                  </a:tcPr>
                 </a:tc>
               </a:tr>
             </a:tbl>
@@ -19712,7 +20790,7 @@
         </p:nvSpPr>
         <p:spPr>
           <a:xfrm>
-            <a:off x="548640" y="5349240"/>
+            <a:off x="548640" y="5577840"/>
             <a:ext cx="8046720" cy="457200"/>
           </a:xfrm>
           <a:prstGeom prst="rect">
